--- a/docs/営業改革_小沢さん着任ブリーフ.pptx
+++ b/docs/営業改革_小沢さん着任ブリーフ.pptx
@@ -14,6 +14,7 @@
     <p:sldId id="262" r:id="rId13"/>
     <p:sldId id="263" r:id="rId14"/>
     <p:sldId id="264" r:id="rId15"/>
+    <p:sldId id="265" r:id="rId16"/>
   </p:sldIdLst>
   <p:sldSz cx="12191695" cy="6858000" type="screen4x3"/>
   <p:notesSz cx="6858000" cy="9144000"/>
@@ -3362,6 +3363,1589 @@
                 <a:cs typeface="Yu Gothic"/>
               </a:rPr>
               <a:t>2026年7月16日版 ｜ 社外秘・取扱注意</a:t>
+            </a:r>
+          </a:p>
+        </p:txBody>
+      </p:sp>
+    </p:spTree>
+  </p:cSld>
+  <p:clrMapOvr>
+    <a:masterClrMapping/>
+  </p:clrMapOvr>
+</p:sld>
+</file>
+
+<file path=ppt/slides/slide10.xml><?xml version="1.0" encoding="utf-8"?>
+<p:sld xmlns:a="http://schemas.openxmlformats.org/drawingml/2006/main" xmlns:p="http://schemas.openxmlformats.org/presentationml/2006/main" xmlns:r="http://schemas.openxmlformats.org/officeDocument/2006/relationships">
+  <p:cSld>
+    <p:spTree>
+      <p:nvGrpSpPr>
+        <p:cNvPr id="1" name=""/>
+        <p:cNvGrpSpPr/>
+        <p:nvPr/>
+      </p:nvGrpSpPr>
+      <p:grpSpPr/>
+      <p:sp>
+        <p:nvSpPr>
+          <p:cNvPr id="2" name="TextBox 1"/>
+          <p:cNvSpPr txBox="1"/>
+          <p:nvPr/>
+        </p:nvSpPr>
+        <p:spPr>
+          <a:xfrm>
+            <a:off x="502920" y="256032"/>
+            <a:ext cx="11155680" cy="256032"/>
+          </a:xfrm>
+          <a:prstGeom prst="rect">
+            <a:avLst/>
+          </a:prstGeom>
+          <a:noFill/>
+        </p:spPr>
+        <p:txBody>
+          <a:bodyPr wrap="square" lIns="0" rIns="0" tIns="0" bIns="0">
+            <a:spAutoFit/>
+          </a:bodyPr>
+          <a:lstStyle/>
+          <a:p>
+            <a:pPr algn="l">
+              <a:spcAft>
+                <a:spcPts val="400"/>
+              </a:spcAft>
+            </a:pPr>
+            <a:r>
+              <a:rPr sz="1000" b="1" i="0">
+                <a:solidFill>
+                  <a:srgbClr val="7823DC"/>
+                </a:solidFill>
+                <a:latin typeface="Yu Gothic"/>
+                <a:ea typeface="Yu Gothic"/>
+                <a:cs typeface="Yu Gothic"/>
+              </a:rPr>
+              <a:t>着任準備</a:t>
+            </a:r>
+          </a:p>
+        </p:txBody>
+      </p:sp>
+      <p:sp>
+        <p:nvSpPr>
+          <p:cNvPr id="3" name="TextBox 2"/>
+          <p:cNvSpPr txBox="1"/>
+          <p:nvPr/>
+        </p:nvSpPr>
+        <p:spPr>
+          <a:xfrm>
+            <a:off x="502920" y="512064"/>
+            <a:ext cx="11155680" cy="868680"/>
+          </a:xfrm>
+          <a:prstGeom prst="rect">
+            <a:avLst/>
+          </a:prstGeom>
+          <a:noFill/>
+        </p:spPr>
+        <p:txBody>
+          <a:bodyPr wrap="square" lIns="0" rIns="0" tIns="0" bIns="0">
+            <a:spAutoFit/>
+          </a:bodyPr>
+          <a:lstStyle/>
+          <a:p>
+            <a:pPr algn="l">
+              <a:spcAft>
+                <a:spcPts val="0"/>
+              </a:spcAft>
+            </a:pPr>
+            <a:r>
+              <a:rPr sz="1900" b="1" i="0">
+                <a:solidFill>
+                  <a:srgbClr val="262630"/>
+                </a:solidFill>
+                <a:latin typeface="Yu Gothic"/>
+                <a:ea typeface="Yu Gothic"/>
+                <a:cs typeface="Yu Gothic"/>
+              </a:rPr>
+              <a:t>資料の読む順と初週の予定</a:t>
+            </a:r>
+          </a:p>
+        </p:txBody>
+      </p:sp>
+      <p:sp>
+        <p:nvSpPr>
+          <p:cNvPr id="4" name="Rectangle 3"/>
+          <p:cNvSpPr/>
+          <p:nvPr/>
+        </p:nvSpPr>
+        <p:spPr>
+          <a:xfrm>
+            <a:off x="502920" y="1389888"/>
+            <a:ext cx="1463040" cy="33020"/>
+          </a:xfrm>
+          <a:prstGeom prst="rect">
+            <a:avLst/>
+          </a:prstGeom>
+          <a:solidFill>
+            <a:srgbClr val="7823DC"/>
+          </a:solidFill>
+          <a:ln>
+            <a:noFill/>
+          </a:ln>
+          <a:effectLst/>
+        </p:spPr>
+        <p:style>
+          <a:lnRef idx="1">
+            <a:schemeClr val="accent1"/>
+          </a:lnRef>
+          <a:fillRef idx="3">
+            <a:schemeClr val="accent1"/>
+          </a:fillRef>
+          <a:effectRef idx="2">
+            <a:schemeClr val="accent1"/>
+          </a:effectRef>
+          <a:fontRef idx="minor">
+            <a:schemeClr val="lt1"/>
+          </a:fontRef>
+        </p:style>
+        <p:txBody>
+          <a:bodyPr rtlCol="0" anchor="ctr"/>
+          <a:lstStyle/>
+          <a:p>
+            <a:pPr algn="ctr"/>
+          </a:p>
+        </p:txBody>
+      </p:sp>
+      <p:sp>
+        <p:nvSpPr>
+          <p:cNvPr id="5" name="Rectangle 4"/>
+          <p:cNvSpPr/>
+          <p:nvPr/>
+        </p:nvSpPr>
+        <p:spPr>
+          <a:xfrm>
+            <a:off x="502920" y="1920240"/>
+            <a:ext cx="5486400" cy="2999232"/>
+          </a:xfrm>
+          <a:prstGeom prst="rect">
+            <a:avLst/>
+          </a:prstGeom>
+          <a:solidFill>
+            <a:srgbClr val="FFFFFF"/>
+          </a:solidFill>
+          <a:ln w="9525">
+            <a:solidFill>
+              <a:srgbClr val="D9D9E0"/>
+            </a:solidFill>
+          </a:ln>
+          <a:effectLst/>
+        </p:spPr>
+        <p:style>
+          <a:lnRef idx="1">
+            <a:schemeClr val="accent1"/>
+          </a:lnRef>
+          <a:fillRef idx="3">
+            <a:schemeClr val="accent1"/>
+          </a:fillRef>
+          <a:effectRef idx="2">
+            <a:schemeClr val="accent1"/>
+          </a:effectRef>
+          <a:fontRef idx="minor">
+            <a:schemeClr val="lt1"/>
+          </a:fontRef>
+        </p:style>
+        <p:txBody>
+          <a:bodyPr rtlCol="0" anchor="ctr"/>
+          <a:lstStyle/>
+          <a:p>
+            <a:pPr algn="ctr"/>
+          </a:p>
+        </p:txBody>
+      </p:sp>
+      <p:sp>
+        <p:nvSpPr>
+          <p:cNvPr id="6" name="Rectangle 5"/>
+          <p:cNvSpPr/>
+          <p:nvPr/>
+        </p:nvSpPr>
+        <p:spPr>
+          <a:xfrm>
+            <a:off x="502920" y="1920240"/>
+            <a:ext cx="5486400" cy="457200"/>
+          </a:xfrm>
+          <a:prstGeom prst="rect">
+            <a:avLst/>
+          </a:prstGeom>
+          <a:solidFill>
+            <a:srgbClr val="3A106E"/>
+          </a:solidFill>
+          <a:ln>
+            <a:noFill/>
+          </a:ln>
+          <a:effectLst/>
+        </p:spPr>
+        <p:style>
+          <a:lnRef idx="1">
+            <a:schemeClr val="accent1"/>
+          </a:lnRef>
+          <a:fillRef idx="3">
+            <a:schemeClr val="accent1"/>
+          </a:fillRef>
+          <a:effectRef idx="2">
+            <a:schemeClr val="accent1"/>
+          </a:effectRef>
+          <a:fontRef idx="minor">
+            <a:schemeClr val="lt1"/>
+          </a:fontRef>
+        </p:style>
+        <p:txBody>
+          <a:bodyPr rtlCol="0" anchor="ctr"/>
+          <a:lstStyle/>
+          <a:p>
+            <a:pPr algn="ctr"/>
+          </a:p>
+        </p:txBody>
+      </p:sp>
+      <p:sp>
+        <p:nvSpPr>
+          <p:cNvPr id="7" name="TextBox 6"/>
+          <p:cNvSpPr txBox="1"/>
+          <p:nvPr/>
+        </p:nvSpPr>
+        <p:spPr>
+          <a:xfrm>
+            <a:off x="502920" y="1920240"/>
+            <a:ext cx="5486400" cy="457200"/>
+          </a:xfrm>
+          <a:prstGeom prst="rect">
+            <a:avLst/>
+          </a:prstGeom>
+          <a:noFill/>
+        </p:spPr>
+        <p:txBody>
+          <a:bodyPr wrap="square" lIns="0" rIns="0" tIns="0" bIns="0" anchor="ctr">
+            <a:spAutoFit/>
+          </a:bodyPr>
+          <a:lstStyle/>
+          <a:p>
+            <a:pPr algn="ctr">
+              <a:spcAft>
+                <a:spcPts val="0"/>
+              </a:spcAft>
+            </a:pPr>
+            <a:r>
+              <a:rPr sz="1200" b="1" i="0">
+                <a:solidFill>
+                  <a:srgbClr val="FFFFFF"/>
+                </a:solidFill>
+                <a:latin typeface="Yu Gothic"/>
+                <a:ea typeface="Yu Gothic"/>
+                <a:cs typeface="Yu Gothic"/>
+              </a:rPr>
+              <a:t>資料の読む順（4ステップ）</a:t>
+            </a:r>
+          </a:p>
+        </p:txBody>
+      </p:sp>
+      <p:sp>
+        <p:nvSpPr>
+          <p:cNvPr id="8" name="Oval 7"/>
+          <p:cNvSpPr/>
+          <p:nvPr/>
+        </p:nvSpPr>
+        <p:spPr>
+          <a:xfrm>
+            <a:off x="713232" y="2578608"/>
+            <a:ext cx="365760" cy="365760"/>
+          </a:xfrm>
+          <a:prstGeom prst="ellipse">
+            <a:avLst/>
+          </a:prstGeom>
+          <a:solidFill>
+            <a:srgbClr val="7823DC"/>
+          </a:solidFill>
+          <a:ln>
+            <a:noFill/>
+          </a:ln>
+          <a:effectLst/>
+        </p:spPr>
+        <p:style>
+          <a:lnRef idx="1">
+            <a:schemeClr val="accent1"/>
+          </a:lnRef>
+          <a:fillRef idx="3">
+            <a:schemeClr val="accent1"/>
+          </a:fillRef>
+          <a:effectRef idx="2">
+            <a:schemeClr val="accent1"/>
+          </a:effectRef>
+          <a:fontRef idx="minor">
+            <a:schemeClr val="lt1"/>
+          </a:fontRef>
+        </p:style>
+        <p:txBody>
+          <a:bodyPr rtlCol="0" anchor="ctr" wrap="none" lIns="0" rIns="0" tIns="0" bIns="0"/>
+          <a:lstStyle/>
+          <a:p>
+            <a:pPr algn="ctr">
+              <a:spcAft>
+                <a:spcPts val="0"/>
+              </a:spcAft>
+            </a:pPr>
+            <a:r>
+              <a:rPr sz="1400" b="1" i="0">
+                <a:solidFill>
+                  <a:srgbClr val="FFFFFF"/>
+                </a:solidFill>
+                <a:latin typeface="Yu Gothic"/>
+                <a:ea typeface="Yu Gothic"/>
+                <a:cs typeface="Yu Gothic"/>
+              </a:rPr>
+              <a:t>1</a:t>
+            </a:r>
+          </a:p>
+        </p:txBody>
+      </p:sp>
+      <p:sp>
+        <p:nvSpPr>
+          <p:cNvPr id="9" name="TextBox 8"/>
+          <p:cNvSpPr txBox="1"/>
+          <p:nvPr/>
+        </p:nvSpPr>
+        <p:spPr>
+          <a:xfrm>
+            <a:off x="1225296" y="2542032"/>
+            <a:ext cx="4626864" cy="566928"/>
+          </a:xfrm>
+          <a:prstGeom prst="rect">
+            <a:avLst/>
+          </a:prstGeom>
+          <a:noFill/>
+        </p:spPr>
+        <p:txBody>
+          <a:bodyPr wrap="square" lIns="0" rIns="0" tIns="0" bIns="0" anchor="ctr">
+            <a:spAutoFit/>
+          </a:bodyPr>
+          <a:lstStyle/>
+          <a:p>
+            <a:pPr algn="l">
+              <a:spcAft>
+                <a:spcPts val="0"/>
+              </a:spcAft>
+            </a:pPr>
+            <a:r>
+              <a:rPr sz="1050" b="0" i="0">
+                <a:solidFill>
+                  <a:srgbClr val="262630"/>
+                </a:solidFill>
+                <a:latin typeface="Yu Gothic"/>
+                <a:ea typeface="Yu Gothic"/>
+                <a:cs typeface="Yu Gothic"/>
+              </a:rPr>
+              <a:t>プロジェクト1枚（全員の共通言語・A4一枚）</a:t>
+            </a:r>
+          </a:p>
+        </p:txBody>
+      </p:sp>
+      <p:sp>
+        <p:nvSpPr>
+          <p:cNvPr id="10" name="Oval 9"/>
+          <p:cNvSpPr/>
+          <p:nvPr/>
+        </p:nvSpPr>
+        <p:spPr>
+          <a:xfrm>
+            <a:off x="713232" y="3145536"/>
+            <a:ext cx="365760" cy="365760"/>
+          </a:xfrm>
+          <a:prstGeom prst="ellipse">
+            <a:avLst/>
+          </a:prstGeom>
+          <a:solidFill>
+            <a:srgbClr val="7823DC"/>
+          </a:solidFill>
+          <a:ln>
+            <a:noFill/>
+          </a:ln>
+          <a:effectLst/>
+        </p:spPr>
+        <p:style>
+          <a:lnRef idx="1">
+            <a:schemeClr val="accent1"/>
+          </a:lnRef>
+          <a:fillRef idx="3">
+            <a:schemeClr val="accent1"/>
+          </a:fillRef>
+          <a:effectRef idx="2">
+            <a:schemeClr val="accent1"/>
+          </a:effectRef>
+          <a:fontRef idx="minor">
+            <a:schemeClr val="lt1"/>
+          </a:fontRef>
+        </p:style>
+        <p:txBody>
+          <a:bodyPr rtlCol="0" anchor="ctr" wrap="none" lIns="0" rIns="0" tIns="0" bIns="0"/>
+          <a:lstStyle/>
+          <a:p>
+            <a:pPr algn="ctr">
+              <a:spcAft>
+                <a:spcPts val="0"/>
+              </a:spcAft>
+            </a:pPr>
+            <a:r>
+              <a:rPr sz="1400" b="1" i="0">
+                <a:solidFill>
+                  <a:srgbClr val="FFFFFF"/>
+                </a:solidFill>
+                <a:latin typeface="Yu Gothic"/>
+                <a:ea typeface="Yu Gothic"/>
+                <a:cs typeface="Yu Gothic"/>
+              </a:rPr>
+              <a:t>2</a:t>
+            </a:r>
+          </a:p>
+        </p:txBody>
+      </p:sp>
+      <p:sp>
+        <p:nvSpPr>
+          <p:cNvPr id="11" name="TextBox 10"/>
+          <p:cNvSpPr txBox="1"/>
+          <p:nvPr/>
+        </p:nvSpPr>
+        <p:spPr>
+          <a:xfrm>
+            <a:off x="1225296" y="3108960"/>
+            <a:ext cx="4626864" cy="566928"/>
+          </a:xfrm>
+          <a:prstGeom prst="rect">
+            <a:avLst/>
+          </a:prstGeom>
+          <a:noFill/>
+        </p:spPr>
+        <p:txBody>
+          <a:bodyPr wrap="square" lIns="0" rIns="0" tIns="0" bIns="0" anchor="ctr">
+            <a:spAutoFit/>
+          </a:bodyPr>
+          <a:lstStyle/>
+          <a:p>
+            <a:pPr algn="l">
+              <a:spcAft>
+                <a:spcPts val="0"/>
+              </a:spcAft>
+            </a:pPr>
+            <a:r>
+              <a:rPr sz="1050" b="0" i="0">
+                <a:solidFill>
+                  <a:srgbClr val="262630"/>
+                </a:solidFill>
+                <a:latin typeface="Yu Gothic"/>
+                <a:ea typeface="Yu Gothic"/>
+                <a:cs typeface="Yu Gothic"/>
+              </a:rPr>
+              <a:t>本ブリーフ（この文書）</a:t>
+            </a:r>
+          </a:p>
+        </p:txBody>
+      </p:sp>
+      <p:sp>
+        <p:nvSpPr>
+          <p:cNvPr id="12" name="Oval 11"/>
+          <p:cNvSpPr/>
+          <p:nvPr/>
+        </p:nvSpPr>
+        <p:spPr>
+          <a:xfrm>
+            <a:off x="713232" y="3712464"/>
+            <a:ext cx="365760" cy="365760"/>
+          </a:xfrm>
+          <a:prstGeom prst="ellipse">
+            <a:avLst/>
+          </a:prstGeom>
+          <a:solidFill>
+            <a:srgbClr val="7823DC"/>
+          </a:solidFill>
+          <a:ln>
+            <a:noFill/>
+          </a:ln>
+          <a:effectLst/>
+        </p:spPr>
+        <p:style>
+          <a:lnRef idx="1">
+            <a:schemeClr val="accent1"/>
+          </a:lnRef>
+          <a:fillRef idx="3">
+            <a:schemeClr val="accent1"/>
+          </a:fillRef>
+          <a:effectRef idx="2">
+            <a:schemeClr val="accent1"/>
+          </a:effectRef>
+          <a:fontRef idx="minor">
+            <a:schemeClr val="lt1"/>
+          </a:fontRef>
+        </p:style>
+        <p:txBody>
+          <a:bodyPr rtlCol="0" anchor="ctr" wrap="none" lIns="0" rIns="0" tIns="0" bIns="0"/>
+          <a:lstStyle/>
+          <a:p>
+            <a:pPr algn="ctr">
+              <a:spcAft>
+                <a:spcPts val="0"/>
+              </a:spcAft>
+            </a:pPr>
+            <a:r>
+              <a:rPr sz="1400" b="1" i="0">
+                <a:solidFill>
+                  <a:srgbClr val="FFFFFF"/>
+                </a:solidFill>
+                <a:latin typeface="Yu Gothic"/>
+                <a:ea typeface="Yu Gothic"/>
+                <a:cs typeface="Yu Gothic"/>
+              </a:rPr>
+              <a:t>3</a:t>
+            </a:r>
+          </a:p>
+        </p:txBody>
+      </p:sp>
+      <p:sp>
+        <p:nvSpPr>
+          <p:cNvPr id="13" name="TextBox 12"/>
+          <p:cNvSpPr txBox="1"/>
+          <p:nvPr/>
+        </p:nvSpPr>
+        <p:spPr>
+          <a:xfrm>
+            <a:off x="1225296" y="3675888"/>
+            <a:ext cx="4626864" cy="566928"/>
+          </a:xfrm>
+          <a:prstGeom prst="rect">
+            <a:avLst/>
+          </a:prstGeom>
+          <a:noFill/>
+        </p:spPr>
+        <p:txBody>
+          <a:bodyPr wrap="square" lIns="0" rIns="0" tIns="0" bIns="0" anchor="ctr">
+            <a:spAutoFit/>
+          </a:bodyPr>
+          <a:lstStyle/>
+          <a:p>
+            <a:pPr algn="l">
+              <a:spcAft>
+                <a:spcPts val="0"/>
+              </a:spcAft>
+            </a:pPr>
+            <a:r>
+              <a:rPr sz="1050" b="0" i="0">
+                <a:solidFill>
+                  <a:srgbClr val="262630"/>
+                </a:solidFill>
+                <a:latin typeface="Yu Gothic"/>
+                <a:ea typeface="Yu Gothic"/>
+                <a:cs typeface="Yu Gothic"/>
+              </a:rPr>
+              <a:t>STO設計書＋運用指南書2章（小沢さんの章）</a:t>
+            </a:r>
+          </a:p>
+        </p:txBody>
+      </p:sp>
+      <p:sp>
+        <p:nvSpPr>
+          <p:cNvPr id="14" name="Oval 13"/>
+          <p:cNvSpPr/>
+          <p:nvPr/>
+        </p:nvSpPr>
+        <p:spPr>
+          <a:xfrm>
+            <a:off x="713232" y="4279392"/>
+            <a:ext cx="365760" cy="365760"/>
+          </a:xfrm>
+          <a:prstGeom prst="ellipse">
+            <a:avLst/>
+          </a:prstGeom>
+          <a:solidFill>
+            <a:srgbClr val="7823DC"/>
+          </a:solidFill>
+          <a:ln>
+            <a:noFill/>
+          </a:ln>
+          <a:effectLst/>
+        </p:spPr>
+        <p:style>
+          <a:lnRef idx="1">
+            <a:schemeClr val="accent1"/>
+          </a:lnRef>
+          <a:fillRef idx="3">
+            <a:schemeClr val="accent1"/>
+          </a:fillRef>
+          <a:effectRef idx="2">
+            <a:schemeClr val="accent1"/>
+          </a:effectRef>
+          <a:fontRef idx="minor">
+            <a:schemeClr val="lt1"/>
+          </a:fontRef>
+        </p:style>
+        <p:txBody>
+          <a:bodyPr rtlCol="0" anchor="ctr" wrap="none" lIns="0" rIns="0" tIns="0" bIns="0"/>
+          <a:lstStyle/>
+          <a:p>
+            <a:pPr algn="ctr">
+              <a:spcAft>
+                <a:spcPts val="0"/>
+              </a:spcAft>
+            </a:pPr>
+            <a:r>
+              <a:rPr sz="1400" b="1" i="0">
+                <a:solidFill>
+                  <a:srgbClr val="FFFFFF"/>
+                </a:solidFill>
+                <a:latin typeface="Yu Gothic"/>
+                <a:ea typeface="Yu Gothic"/>
+                <a:cs typeface="Yu Gothic"/>
+              </a:rPr>
+              <a:t>4</a:t>
+            </a:r>
+          </a:p>
+        </p:txBody>
+      </p:sp>
+      <p:sp>
+        <p:nvSpPr>
+          <p:cNvPr id="15" name="TextBox 14"/>
+          <p:cNvSpPr txBox="1"/>
+          <p:nvPr/>
+        </p:nvSpPr>
+        <p:spPr>
+          <a:xfrm>
+            <a:off x="1225296" y="4242816"/>
+            <a:ext cx="4626864" cy="566928"/>
+          </a:xfrm>
+          <a:prstGeom prst="rect">
+            <a:avLst/>
+          </a:prstGeom>
+          <a:noFill/>
+        </p:spPr>
+        <p:txBody>
+          <a:bodyPr wrap="square" lIns="0" rIns="0" tIns="0" bIns="0" anchor="ctr">
+            <a:spAutoFit/>
+          </a:bodyPr>
+          <a:lstStyle/>
+          <a:p>
+            <a:pPr algn="l">
+              <a:spcAft>
+                <a:spcPts val="0"/>
+              </a:spcAft>
+            </a:pPr>
+            <a:r>
+              <a:rPr sz="1050" b="0" i="0">
+                <a:solidFill>
+                  <a:srgbClr val="262630"/>
+                </a:solidFill>
+                <a:latin typeface="Yu Gothic"/>
+                <a:ea typeface="Yu Gothic"/>
+                <a:cs typeface="Yu Gothic"/>
+              </a:rPr>
+              <a:t>着手テーマの該当設計メモを都度（成果目標／監修改革ほか）</a:t>
+            </a:r>
+          </a:p>
+        </p:txBody>
+      </p:sp>
+      <p:sp>
+        <p:nvSpPr>
+          <p:cNvPr id="16" name="Rectangle 15"/>
+          <p:cNvSpPr/>
+          <p:nvPr/>
+        </p:nvSpPr>
+        <p:spPr>
+          <a:xfrm>
+            <a:off x="6199632" y="1920240"/>
+            <a:ext cx="5486400" cy="2999232"/>
+          </a:xfrm>
+          <a:prstGeom prst="rect">
+            <a:avLst/>
+          </a:prstGeom>
+          <a:solidFill>
+            <a:srgbClr val="FFFFFF"/>
+          </a:solidFill>
+          <a:ln w="9525">
+            <a:solidFill>
+              <a:srgbClr val="D9D9E0"/>
+            </a:solidFill>
+          </a:ln>
+          <a:effectLst/>
+        </p:spPr>
+        <p:style>
+          <a:lnRef idx="1">
+            <a:schemeClr val="accent1"/>
+          </a:lnRef>
+          <a:fillRef idx="3">
+            <a:schemeClr val="accent1"/>
+          </a:fillRef>
+          <a:effectRef idx="2">
+            <a:schemeClr val="accent1"/>
+          </a:effectRef>
+          <a:fontRef idx="minor">
+            <a:schemeClr val="lt1"/>
+          </a:fontRef>
+        </p:style>
+        <p:txBody>
+          <a:bodyPr rtlCol="0" anchor="ctr"/>
+          <a:lstStyle/>
+          <a:p>
+            <a:pPr algn="ctr"/>
+          </a:p>
+        </p:txBody>
+      </p:sp>
+      <p:sp>
+        <p:nvSpPr>
+          <p:cNvPr id="17" name="Rectangle 16"/>
+          <p:cNvSpPr/>
+          <p:nvPr/>
+        </p:nvSpPr>
+        <p:spPr>
+          <a:xfrm>
+            <a:off x="6199632" y="1920240"/>
+            <a:ext cx="5486400" cy="457200"/>
+          </a:xfrm>
+          <a:prstGeom prst="rect">
+            <a:avLst/>
+          </a:prstGeom>
+          <a:solidFill>
+            <a:srgbClr val="7823DC"/>
+          </a:solidFill>
+          <a:ln>
+            <a:noFill/>
+          </a:ln>
+          <a:effectLst/>
+        </p:spPr>
+        <p:style>
+          <a:lnRef idx="1">
+            <a:schemeClr val="accent1"/>
+          </a:lnRef>
+          <a:fillRef idx="3">
+            <a:schemeClr val="accent1"/>
+          </a:fillRef>
+          <a:effectRef idx="2">
+            <a:schemeClr val="accent1"/>
+          </a:effectRef>
+          <a:fontRef idx="minor">
+            <a:schemeClr val="lt1"/>
+          </a:fontRef>
+        </p:style>
+        <p:txBody>
+          <a:bodyPr rtlCol="0" anchor="ctr"/>
+          <a:lstStyle/>
+          <a:p>
+            <a:pPr algn="ctr"/>
+          </a:p>
+        </p:txBody>
+      </p:sp>
+      <p:sp>
+        <p:nvSpPr>
+          <p:cNvPr id="18" name="TextBox 17"/>
+          <p:cNvSpPr txBox="1"/>
+          <p:nvPr/>
+        </p:nvSpPr>
+        <p:spPr>
+          <a:xfrm>
+            <a:off x="6199632" y="1920240"/>
+            <a:ext cx="5486400" cy="457200"/>
+          </a:xfrm>
+          <a:prstGeom prst="rect">
+            <a:avLst/>
+          </a:prstGeom>
+          <a:noFill/>
+        </p:spPr>
+        <p:txBody>
+          <a:bodyPr wrap="square" lIns="0" rIns="0" tIns="0" bIns="0" anchor="ctr">
+            <a:spAutoFit/>
+          </a:bodyPr>
+          <a:lstStyle/>
+          <a:p>
+            <a:pPr algn="ctr">
+              <a:spcAft>
+                <a:spcPts val="0"/>
+              </a:spcAft>
+            </a:pPr>
+            <a:r>
+              <a:rPr sz="1200" b="1" i="0">
+                <a:solidFill>
+                  <a:srgbClr val="FFFFFF"/>
+                </a:solidFill>
+                <a:latin typeface="Yu Gothic"/>
+                <a:ea typeface="Yu Gothic"/>
+                <a:cs typeface="Yu Gothic"/>
+              </a:rPr>
+              <a:t>初週の予定（新谷がセット）</a:t>
+            </a:r>
+          </a:p>
+        </p:txBody>
+      </p:sp>
+      <p:sp>
+        <p:nvSpPr>
+          <p:cNvPr id="19" name="Rectangle 18"/>
+          <p:cNvSpPr/>
+          <p:nvPr/>
+        </p:nvSpPr>
+        <p:spPr>
+          <a:xfrm>
+            <a:off x="6400800" y="2596896"/>
+            <a:ext cx="1188720" cy="384048"/>
+          </a:xfrm>
+          <a:prstGeom prst="rect">
+            <a:avLst/>
+          </a:prstGeom>
+          <a:solidFill>
+            <a:srgbClr val="F3EFFB"/>
+          </a:solidFill>
+          <a:ln>
+            <a:noFill/>
+          </a:ln>
+          <a:effectLst/>
+        </p:spPr>
+        <p:style>
+          <a:lnRef idx="1">
+            <a:schemeClr val="accent1"/>
+          </a:lnRef>
+          <a:fillRef idx="3">
+            <a:schemeClr val="accent1"/>
+          </a:fillRef>
+          <a:effectRef idx="2">
+            <a:schemeClr val="accent1"/>
+          </a:effectRef>
+          <a:fontRef idx="minor">
+            <a:schemeClr val="lt1"/>
+          </a:fontRef>
+        </p:style>
+        <p:txBody>
+          <a:bodyPr rtlCol="0" anchor="ctr"/>
+          <a:lstStyle/>
+          <a:p>
+            <a:pPr algn="ctr"/>
+          </a:p>
+        </p:txBody>
+      </p:sp>
+      <p:sp>
+        <p:nvSpPr>
+          <p:cNvPr id="20" name="TextBox 19"/>
+          <p:cNvSpPr txBox="1"/>
+          <p:nvPr/>
+        </p:nvSpPr>
+        <p:spPr>
+          <a:xfrm>
+            <a:off x="6400800" y="2596896"/>
+            <a:ext cx="1188720" cy="384048"/>
+          </a:xfrm>
+          <a:prstGeom prst="rect">
+            <a:avLst/>
+          </a:prstGeom>
+          <a:noFill/>
+        </p:spPr>
+        <p:txBody>
+          <a:bodyPr wrap="square" lIns="0" rIns="0" tIns="0" bIns="0" anchor="ctr">
+            <a:spAutoFit/>
+          </a:bodyPr>
+          <a:lstStyle/>
+          <a:p>
+            <a:pPr algn="ctr">
+              <a:spcAft>
+                <a:spcPts val="0"/>
+              </a:spcAft>
+            </a:pPr>
+            <a:r>
+              <a:rPr sz="1000" b="1" i="0">
+                <a:solidFill>
+                  <a:srgbClr val="7823DC"/>
+                </a:solidFill>
+                <a:latin typeface="Yu Gothic"/>
+                <a:ea typeface="Yu Gothic"/>
+                <a:cs typeface="Yu Gothic"/>
+              </a:rPr>
+              <a:t>30分</a:t>
+            </a:r>
+          </a:p>
+        </p:txBody>
+      </p:sp>
+      <p:sp>
+        <p:nvSpPr>
+          <p:cNvPr id="21" name="TextBox 20"/>
+          <p:cNvSpPr txBox="1"/>
+          <p:nvPr/>
+        </p:nvSpPr>
+        <p:spPr>
+          <a:xfrm>
+            <a:off x="7717536" y="2542032"/>
+            <a:ext cx="3803904" cy="566928"/>
+          </a:xfrm>
+          <a:prstGeom prst="rect">
+            <a:avLst/>
+          </a:prstGeom>
+          <a:noFill/>
+        </p:spPr>
+        <p:txBody>
+          <a:bodyPr wrap="square" lIns="0" rIns="0" tIns="0" bIns="0" anchor="ctr">
+            <a:spAutoFit/>
+          </a:bodyPr>
+          <a:lstStyle/>
+          <a:p>
+            <a:pPr algn="l">
+              <a:spcAft>
+                <a:spcPts val="0"/>
+              </a:spcAft>
+            </a:pPr>
+            <a:r>
+              <a:rPr sz="1050" b="0" i="0">
+                <a:solidFill>
+                  <a:srgbClr val="262630"/>
+                </a:solidFill>
+                <a:latin typeface="Yu Gothic"/>
+                <a:ea typeface="Yu Gothic"/>
+                <a:cs typeface="Yu Gothic"/>
+              </a:rPr>
+              <a:t>この文書の読み合わせ</a:t>
+            </a:r>
+          </a:p>
+        </p:txBody>
+      </p:sp>
+      <p:sp>
+        <p:nvSpPr>
+          <p:cNvPr id="22" name="Rectangle 21"/>
+          <p:cNvSpPr/>
+          <p:nvPr/>
+        </p:nvSpPr>
+        <p:spPr>
+          <a:xfrm>
+            <a:off x="6400800" y="3163824"/>
+            <a:ext cx="1188720" cy="384048"/>
+          </a:xfrm>
+          <a:prstGeom prst="rect">
+            <a:avLst/>
+          </a:prstGeom>
+          <a:solidFill>
+            <a:srgbClr val="F3EFFB"/>
+          </a:solidFill>
+          <a:ln>
+            <a:noFill/>
+          </a:ln>
+          <a:effectLst/>
+        </p:spPr>
+        <p:style>
+          <a:lnRef idx="1">
+            <a:schemeClr val="accent1"/>
+          </a:lnRef>
+          <a:fillRef idx="3">
+            <a:schemeClr val="accent1"/>
+          </a:fillRef>
+          <a:effectRef idx="2">
+            <a:schemeClr val="accent1"/>
+          </a:effectRef>
+          <a:fontRef idx="minor">
+            <a:schemeClr val="lt1"/>
+          </a:fontRef>
+        </p:style>
+        <p:txBody>
+          <a:bodyPr rtlCol="0" anchor="ctr"/>
+          <a:lstStyle/>
+          <a:p>
+            <a:pPr algn="ctr"/>
+          </a:p>
+        </p:txBody>
+      </p:sp>
+      <p:sp>
+        <p:nvSpPr>
+          <p:cNvPr id="23" name="TextBox 22"/>
+          <p:cNvSpPr txBox="1"/>
+          <p:nvPr/>
+        </p:nvSpPr>
+        <p:spPr>
+          <a:xfrm>
+            <a:off x="6400800" y="3163824"/>
+            <a:ext cx="1188720" cy="384048"/>
+          </a:xfrm>
+          <a:prstGeom prst="rect">
+            <a:avLst/>
+          </a:prstGeom>
+          <a:noFill/>
+        </p:spPr>
+        <p:txBody>
+          <a:bodyPr wrap="square" lIns="0" rIns="0" tIns="0" bIns="0" anchor="ctr">
+            <a:spAutoFit/>
+          </a:bodyPr>
+          <a:lstStyle/>
+          <a:p>
+            <a:pPr algn="ctr">
+              <a:spcAft>
+                <a:spcPts val="0"/>
+              </a:spcAft>
+            </a:pPr>
+            <a:r>
+              <a:rPr sz="1000" b="1" i="0">
+                <a:solidFill>
+                  <a:srgbClr val="7823DC"/>
+                </a:solidFill>
+                <a:latin typeface="Yu Gothic"/>
+                <a:ea typeface="Yu Gothic"/>
+                <a:cs typeface="Yu Gothic"/>
+              </a:rPr>
+              <a:t>60分</a:t>
+            </a:r>
+          </a:p>
+        </p:txBody>
+      </p:sp>
+      <p:sp>
+        <p:nvSpPr>
+          <p:cNvPr id="24" name="TextBox 23"/>
+          <p:cNvSpPr txBox="1"/>
+          <p:nvPr/>
+        </p:nvSpPr>
+        <p:spPr>
+          <a:xfrm>
+            <a:off x="7717536" y="3108960"/>
+            <a:ext cx="3803904" cy="566928"/>
+          </a:xfrm>
+          <a:prstGeom prst="rect">
+            <a:avLst/>
+          </a:prstGeom>
+          <a:noFill/>
+        </p:spPr>
+        <p:txBody>
+          <a:bodyPr wrap="square" lIns="0" rIns="0" tIns="0" bIns="0" anchor="ctr">
+            <a:spAutoFit/>
+          </a:bodyPr>
+          <a:lstStyle/>
+          <a:p>
+            <a:pPr algn="l">
+              <a:spcAft>
+                <a:spcPts val="0"/>
+              </a:spcAft>
+            </a:pPr>
+            <a:r>
+              <a:rPr sz="1050" b="0" i="0">
+                <a:solidFill>
+                  <a:srgbClr val="262630"/>
+                </a:solidFill>
+                <a:latin typeface="Yu Gothic"/>
+                <a:ea typeface="Yu Gothic"/>
+                <a:cs typeface="Yu Gothic"/>
+              </a:rPr>
+              <a:t>坪井さんとデータ現在地確認</a:t>
+            </a:r>
+          </a:p>
+        </p:txBody>
+      </p:sp>
+      <p:sp>
+        <p:nvSpPr>
+          <p:cNvPr id="25" name="Rectangle 24"/>
+          <p:cNvSpPr/>
+          <p:nvPr/>
+        </p:nvSpPr>
+        <p:spPr>
+          <a:xfrm>
+            <a:off x="6400800" y="3730752"/>
+            <a:ext cx="1188720" cy="384048"/>
+          </a:xfrm>
+          <a:prstGeom prst="rect">
+            <a:avLst/>
+          </a:prstGeom>
+          <a:solidFill>
+            <a:srgbClr val="F3EFFB"/>
+          </a:solidFill>
+          <a:ln>
+            <a:noFill/>
+          </a:ln>
+          <a:effectLst/>
+        </p:spPr>
+        <p:style>
+          <a:lnRef idx="1">
+            <a:schemeClr val="accent1"/>
+          </a:lnRef>
+          <a:fillRef idx="3">
+            <a:schemeClr val="accent1"/>
+          </a:fillRef>
+          <a:effectRef idx="2">
+            <a:schemeClr val="accent1"/>
+          </a:effectRef>
+          <a:fontRef idx="minor">
+            <a:schemeClr val="lt1"/>
+          </a:fontRef>
+        </p:style>
+        <p:txBody>
+          <a:bodyPr rtlCol="0" anchor="ctr"/>
+          <a:lstStyle/>
+          <a:p>
+            <a:pPr algn="ctr"/>
+          </a:p>
+        </p:txBody>
+      </p:sp>
+      <p:sp>
+        <p:nvSpPr>
+          <p:cNvPr id="26" name="TextBox 25"/>
+          <p:cNvSpPr txBox="1"/>
+          <p:nvPr/>
+        </p:nvSpPr>
+        <p:spPr>
+          <a:xfrm>
+            <a:off x="6400800" y="3730752"/>
+            <a:ext cx="1188720" cy="384048"/>
+          </a:xfrm>
+          <a:prstGeom prst="rect">
+            <a:avLst/>
+          </a:prstGeom>
+          <a:noFill/>
+        </p:spPr>
+        <p:txBody>
+          <a:bodyPr wrap="square" lIns="0" rIns="0" tIns="0" bIns="0" anchor="ctr">
+            <a:spAutoFit/>
+          </a:bodyPr>
+          <a:lstStyle/>
+          <a:p>
+            <a:pPr algn="ctr">
+              <a:spcAft>
+                <a:spcPts val="0"/>
+              </a:spcAft>
+            </a:pPr>
+            <a:r>
+              <a:rPr sz="1000" b="1" i="0">
+                <a:solidFill>
+                  <a:srgbClr val="7823DC"/>
+                </a:solidFill>
+                <a:latin typeface="Yu Gothic"/>
+                <a:ea typeface="Yu Gothic"/>
+                <a:cs typeface="Yu Gothic"/>
+              </a:rPr>
+              <a:t>30分</a:t>
+            </a:r>
+          </a:p>
+        </p:txBody>
+      </p:sp>
+      <p:sp>
+        <p:nvSpPr>
+          <p:cNvPr id="27" name="TextBox 26"/>
+          <p:cNvSpPr txBox="1"/>
+          <p:nvPr/>
+        </p:nvSpPr>
+        <p:spPr>
+          <a:xfrm>
+            <a:off x="7717536" y="3675888"/>
+            <a:ext cx="3803904" cy="566928"/>
+          </a:xfrm>
+          <a:prstGeom prst="rect">
+            <a:avLst/>
+          </a:prstGeom>
+          <a:noFill/>
+        </p:spPr>
+        <p:txBody>
+          <a:bodyPr wrap="square" lIns="0" rIns="0" tIns="0" bIns="0" anchor="ctr">
+            <a:spAutoFit/>
+          </a:bodyPr>
+          <a:lstStyle/>
+          <a:p>
+            <a:pPr algn="l">
+              <a:spcAft>
+                <a:spcPts val="0"/>
+              </a:spcAft>
+            </a:pPr>
+            <a:r>
+              <a:rPr sz="1050" b="0" i="0">
+                <a:solidFill>
+                  <a:srgbClr val="262630"/>
+                </a:solidFill>
+                <a:latin typeface="Yu Gothic"/>
+                <a:ea typeface="Yu Gothic"/>
+                <a:cs typeface="Yu Gothic"/>
+              </a:rPr>
+              <a:t>大塩さんと読み管理・並走PJ引き継ぎ</a:t>
+            </a:r>
+          </a:p>
+        </p:txBody>
+      </p:sp>
+      <p:sp>
+        <p:nvSpPr>
+          <p:cNvPr id="28" name="Rectangle 27"/>
+          <p:cNvSpPr/>
+          <p:nvPr/>
+        </p:nvSpPr>
+        <p:spPr>
+          <a:xfrm>
+            <a:off x="6400800" y="4297680"/>
+            <a:ext cx="1188720" cy="384048"/>
+          </a:xfrm>
+          <a:prstGeom prst="rect">
+            <a:avLst/>
+          </a:prstGeom>
+          <a:solidFill>
+            <a:srgbClr val="F3EFFB"/>
+          </a:solidFill>
+          <a:ln>
+            <a:noFill/>
+          </a:ln>
+          <a:effectLst/>
+        </p:spPr>
+        <p:style>
+          <a:lnRef idx="1">
+            <a:schemeClr val="accent1"/>
+          </a:lnRef>
+          <a:fillRef idx="3">
+            <a:schemeClr val="accent1"/>
+          </a:fillRef>
+          <a:effectRef idx="2">
+            <a:schemeClr val="accent1"/>
+          </a:effectRef>
+          <a:fontRef idx="minor">
+            <a:schemeClr val="lt1"/>
+          </a:fontRef>
+        </p:style>
+        <p:txBody>
+          <a:bodyPr rtlCol="0" anchor="ctr"/>
+          <a:lstStyle/>
+          <a:p>
+            <a:pPr algn="ctr"/>
+          </a:p>
+        </p:txBody>
+      </p:sp>
+      <p:sp>
+        <p:nvSpPr>
+          <p:cNvPr id="29" name="TextBox 28"/>
+          <p:cNvSpPr txBox="1"/>
+          <p:nvPr/>
+        </p:nvSpPr>
+        <p:spPr>
+          <a:xfrm>
+            <a:off x="6400800" y="4297680"/>
+            <a:ext cx="1188720" cy="384048"/>
+          </a:xfrm>
+          <a:prstGeom prst="rect">
+            <a:avLst/>
+          </a:prstGeom>
+          <a:noFill/>
+        </p:spPr>
+        <p:txBody>
+          <a:bodyPr wrap="square" lIns="0" rIns="0" tIns="0" bIns="0" anchor="ctr">
+            <a:spAutoFit/>
+          </a:bodyPr>
+          <a:lstStyle/>
+          <a:p>
+            <a:pPr algn="ctr">
+              <a:spcAft>
+                <a:spcPts val="0"/>
+              </a:spcAft>
+            </a:pPr>
+            <a:r>
+              <a:rPr sz="1000" b="1" i="0">
+                <a:solidFill>
+                  <a:srgbClr val="7823DC"/>
+                </a:solidFill>
+                <a:latin typeface="Yu Gothic"/>
+                <a:ea typeface="Yu Gothic"/>
+                <a:cs typeface="Yu Gothic"/>
+              </a:rPr>
+              <a:t>金曜17:00</a:t>
+            </a:r>
+          </a:p>
+        </p:txBody>
+      </p:sp>
+      <p:sp>
+        <p:nvSpPr>
+          <p:cNvPr id="30" name="TextBox 29"/>
+          <p:cNvSpPr txBox="1"/>
+          <p:nvPr/>
+        </p:nvSpPr>
+        <p:spPr>
+          <a:xfrm>
+            <a:off x="7717536" y="4242816"/>
+            <a:ext cx="3803904" cy="566928"/>
+          </a:xfrm>
+          <a:prstGeom prst="rect">
+            <a:avLst/>
+          </a:prstGeom>
+          <a:noFill/>
+        </p:spPr>
+        <p:txBody>
+          <a:bodyPr wrap="square" lIns="0" rIns="0" tIns="0" bIns="0" anchor="ctr">
+            <a:spAutoFit/>
+          </a:bodyPr>
+          <a:lstStyle/>
+          <a:p>
+            <a:pPr algn="l">
+              <a:spcAft>
+                <a:spcPts val="0"/>
+              </a:spcAft>
+            </a:pPr>
+            <a:r>
+              <a:rPr sz="1050" b="0" i="0">
+                <a:solidFill>
+                  <a:srgbClr val="262630"/>
+                </a:solidFill>
+                <a:latin typeface="Yu Gothic"/>
+                <a:ea typeface="Yu Gothic"/>
+                <a:cs typeface="Yu Gothic"/>
+              </a:rPr>
+              <a:t>週次レビューに初参加</a:t>
+            </a:r>
+          </a:p>
+        </p:txBody>
+      </p:sp>
+      <p:sp>
+        <p:nvSpPr>
+          <p:cNvPr id="31" name="Rectangle 30"/>
+          <p:cNvSpPr/>
+          <p:nvPr/>
+        </p:nvSpPr>
+        <p:spPr>
+          <a:xfrm>
+            <a:off x="502920" y="5138928"/>
+            <a:ext cx="11183112" cy="1005840"/>
+          </a:xfrm>
+          <a:prstGeom prst="rect">
+            <a:avLst/>
+          </a:prstGeom>
+          <a:solidFill>
+            <a:srgbClr val="3A106E"/>
+          </a:solidFill>
+          <a:ln>
+            <a:noFill/>
+          </a:ln>
+          <a:effectLst/>
+        </p:spPr>
+        <p:style>
+          <a:lnRef idx="1">
+            <a:schemeClr val="accent1"/>
+          </a:lnRef>
+          <a:fillRef idx="3">
+            <a:schemeClr val="accent1"/>
+          </a:fillRef>
+          <a:effectRef idx="2">
+            <a:schemeClr val="accent1"/>
+          </a:effectRef>
+          <a:fontRef idx="minor">
+            <a:schemeClr val="lt1"/>
+          </a:fontRef>
+        </p:style>
+        <p:txBody>
+          <a:bodyPr rtlCol="0" anchor="ctr"/>
+          <a:lstStyle/>
+          <a:p>
+            <a:pPr algn="ctr"/>
+          </a:p>
+        </p:txBody>
+      </p:sp>
+      <p:sp>
+        <p:nvSpPr>
+          <p:cNvPr id="32" name="Rectangle 31"/>
+          <p:cNvSpPr/>
+          <p:nvPr/>
+        </p:nvSpPr>
+        <p:spPr>
+          <a:xfrm>
+            <a:off x="502920" y="5138928"/>
+            <a:ext cx="38100" cy="1005840"/>
+          </a:xfrm>
+          <a:prstGeom prst="rect">
+            <a:avLst/>
+          </a:prstGeom>
+          <a:solidFill>
+            <a:srgbClr val="7823DC"/>
+          </a:solidFill>
+          <a:ln>
+            <a:noFill/>
+          </a:ln>
+          <a:effectLst/>
+        </p:spPr>
+        <p:style>
+          <a:lnRef idx="1">
+            <a:schemeClr val="accent1"/>
+          </a:lnRef>
+          <a:fillRef idx="3">
+            <a:schemeClr val="accent1"/>
+          </a:fillRef>
+          <a:effectRef idx="2">
+            <a:schemeClr val="accent1"/>
+          </a:effectRef>
+          <a:fontRef idx="minor">
+            <a:schemeClr val="lt1"/>
+          </a:fontRef>
+        </p:style>
+        <p:txBody>
+          <a:bodyPr rtlCol="0" anchor="ctr"/>
+          <a:lstStyle/>
+          <a:p>
+            <a:pPr algn="ctr"/>
+          </a:p>
+        </p:txBody>
+      </p:sp>
+      <p:sp>
+        <p:nvSpPr>
+          <p:cNvPr id="33" name="TextBox 32"/>
+          <p:cNvSpPr txBox="1"/>
+          <p:nvPr/>
+        </p:nvSpPr>
+        <p:spPr>
+          <a:xfrm>
+            <a:off x="777240" y="5285232"/>
+            <a:ext cx="10698480" cy="749808"/>
+          </a:xfrm>
+          <a:prstGeom prst="rect">
+            <a:avLst/>
+          </a:prstGeom>
+          <a:noFill/>
+        </p:spPr>
+        <p:txBody>
+          <a:bodyPr wrap="square" lIns="0" rIns="0" tIns="0" bIns="0" anchor="ctr">
+            <a:spAutoFit/>
+          </a:bodyPr>
+          <a:lstStyle/>
+          <a:p>
+            <a:pPr algn="l">
+              <a:spcAft>
+                <a:spcPts val="400"/>
+              </a:spcAft>
+            </a:pPr>
+            <a:r>
+              <a:rPr sz="1300" b="1" i="0">
+                <a:solidFill>
+                  <a:srgbClr val="FFFFFF"/>
+                </a:solidFill>
+                <a:latin typeface="Yu Gothic"/>
+                <a:ea typeface="Yu Gothic"/>
+                <a:cs typeface="Yu Gothic"/>
+              </a:rPr>
+              <a:t>外から来た目で「これはおかしい」を遠慮なく言ってください。</a:t>
+            </a:r>
+          </a:p>
+          <a:p>
+            <a:pPr algn="l">
+              <a:spcAft>
+                <a:spcPts val="0"/>
+              </a:spcAft>
+            </a:pPr>
+            <a:r>
+              <a:rPr sz="1300" b="1" i="0">
+                <a:solidFill>
+                  <a:srgbClr val="E0D2F6"/>
+                </a:solidFill>
+                <a:latin typeface="Yu Gothic"/>
+                <a:ea typeface="Yu Gothic"/>
+                <a:cs typeface="Yu Gothic"/>
+              </a:rPr>
+              <a:t>それを言ってもらうための専任です。</a:t>
+            </a:r>
+          </a:p>
+        </p:txBody>
+      </p:sp>
+      <p:sp>
+        <p:nvSpPr>
+          <p:cNvPr id="34" name="Rectangle 33"/>
+          <p:cNvSpPr/>
+          <p:nvPr/>
+        </p:nvSpPr>
+        <p:spPr>
+          <a:xfrm>
+            <a:off x="502920" y="6510528"/>
+            <a:ext cx="11183112" cy="15240"/>
+          </a:xfrm>
+          <a:prstGeom prst="rect">
+            <a:avLst/>
+          </a:prstGeom>
+          <a:solidFill>
+            <a:srgbClr val="D9D9E0"/>
+          </a:solidFill>
+          <a:ln>
+            <a:noFill/>
+          </a:ln>
+          <a:effectLst/>
+        </p:spPr>
+        <p:style>
+          <a:lnRef idx="1">
+            <a:schemeClr val="accent1"/>
+          </a:lnRef>
+          <a:fillRef idx="3">
+            <a:schemeClr val="accent1"/>
+          </a:fillRef>
+          <a:effectRef idx="2">
+            <a:schemeClr val="accent1"/>
+          </a:effectRef>
+          <a:fontRef idx="minor">
+            <a:schemeClr val="lt1"/>
+          </a:fontRef>
+        </p:style>
+        <p:txBody>
+          <a:bodyPr rtlCol="0" anchor="ctr"/>
+          <a:lstStyle/>
+          <a:p>
+            <a:pPr algn="ctr"/>
+          </a:p>
+        </p:txBody>
+      </p:sp>
+      <p:sp>
+        <p:nvSpPr>
+          <p:cNvPr id="35" name="TextBox 34"/>
+          <p:cNvSpPr txBox="1"/>
+          <p:nvPr/>
+        </p:nvSpPr>
+        <p:spPr>
+          <a:xfrm>
+            <a:off x="502920" y="6565392"/>
+            <a:ext cx="8686800" cy="274320"/>
+          </a:xfrm>
+          <a:prstGeom prst="rect">
+            <a:avLst/>
+          </a:prstGeom>
+          <a:noFill/>
+        </p:spPr>
+        <p:txBody>
+          <a:bodyPr wrap="square" lIns="0" rIns="0" tIns="0" bIns="0">
+            <a:spAutoFit/>
+          </a:bodyPr>
+          <a:lstStyle/>
+          <a:p>
+            <a:pPr algn="l">
+              <a:spcAft>
+                <a:spcPts val="400"/>
+              </a:spcAft>
+            </a:pPr>
+            <a:r>
+              <a:rPr sz="750" b="0" i="0">
+                <a:solidFill>
+                  <a:srgbClr val="8A8A99"/>
+                </a:solidFill>
+                <a:latin typeface="Yu Gothic"/>
+                <a:ea typeface="Yu Gothic"/>
+                <a:cs typeface="Yu Gothic"/>
+              </a:rPr>
+              <a:t>円谷プロダクション 営業改革 | 社外秘</a:t>
+            </a:r>
+          </a:p>
+        </p:txBody>
+      </p:sp>
+      <p:sp>
+        <p:nvSpPr>
+          <p:cNvPr id="36" name="TextBox 35"/>
+          <p:cNvSpPr txBox="1"/>
+          <p:nvPr/>
+        </p:nvSpPr>
+        <p:spPr>
+          <a:xfrm>
+            <a:off x="11247120" y="6565392"/>
+            <a:ext cx="457200" cy="274320"/>
+          </a:xfrm>
+          <a:prstGeom prst="rect">
+            <a:avLst/>
+          </a:prstGeom>
+          <a:noFill/>
+        </p:spPr>
+        <p:txBody>
+          <a:bodyPr wrap="square" lIns="0" rIns="0" tIns="0" bIns="0">
+            <a:spAutoFit/>
+          </a:bodyPr>
+          <a:lstStyle/>
+          <a:p>
+            <a:pPr algn="r">
+              <a:spcAft>
+                <a:spcPts val="400"/>
+              </a:spcAft>
+            </a:pPr>
+            <a:r>
+              <a:rPr sz="900" b="0" i="0">
+                <a:solidFill>
+                  <a:srgbClr val="5F5F6E"/>
+                </a:solidFill>
+                <a:latin typeface="Yu Gothic"/>
+                <a:ea typeface="Yu Gothic"/>
+                <a:cs typeface="Yu Gothic"/>
+              </a:rPr>
+              <a:t>10</a:t>
             </a:r>
           </a:p>
         </p:txBody>
@@ -8039,7 +9623,7 @@
                 <a:ea typeface="Yu Gothic"/>
                 <a:cs typeface="Yu Gothic"/>
               </a:rPr>
-              <a:t>改革の「中身」の責任者です</a:t>
+              <a:t>小沢さんに期待する役割（4つ）</a:t>
             </a:r>
           </a:p>
         </p:txBody>
@@ -8096,8 +9680,8 @@
         </p:nvSpPr>
         <p:spPr>
           <a:xfrm>
-            <a:off x="502920" y="1956816"/>
-            <a:ext cx="5486400" cy="2103120"/>
+            <a:off x="502920" y="1773936"/>
+            <a:ext cx="11183112" cy="868680"/>
           </a:xfrm>
           <a:prstGeom prst="rect">
             <a:avLst/>
@@ -8142,95 +9726,10 @@
         </p:nvSpPr>
         <p:spPr>
           <a:xfrm>
-            <a:off x="502920" y="1956816"/>
-            <a:ext cx="5486400" cy="457200"/>
-          </a:xfrm>
-          <a:prstGeom prst="rect">
-            <a:avLst/>
-          </a:prstGeom>
-          <a:solidFill>
-            <a:srgbClr val="3A106E"/>
-          </a:solidFill>
-          <a:ln>
-            <a:noFill/>
-          </a:ln>
-          <a:effectLst/>
-        </p:spPr>
-        <p:style>
-          <a:lnRef idx="1">
-            <a:schemeClr val="accent1"/>
-          </a:lnRef>
-          <a:fillRef idx="3">
-            <a:schemeClr val="accent1"/>
-          </a:fillRef>
-          <a:effectRef idx="2">
-            <a:schemeClr val="accent1"/>
-          </a:effectRef>
-          <a:fontRef idx="minor">
-            <a:schemeClr val="lt1"/>
-          </a:fontRef>
-        </p:style>
-        <p:txBody>
-          <a:bodyPr rtlCol="0" anchor="ctr"/>
-          <a:lstStyle/>
-          <a:p>
-            <a:pPr algn="ctr"/>
-          </a:p>
-        </p:txBody>
-      </p:sp>
-      <p:sp>
-        <p:nvSpPr>
-          <p:cNvPr id="7" name="TextBox 6"/>
-          <p:cNvSpPr txBox="1"/>
-          <p:nvPr/>
-        </p:nvSpPr>
-        <p:spPr>
-          <a:xfrm>
-            <a:off x="502920" y="1956816"/>
-            <a:ext cx="5486400" cy="457200"/>
-          </a:xfrm>
-          <a:prstGeom prst="rect">
-            <a:avLst/>
-          </a:prstGeom>
-          <a:noFill/>
-        </p:spPr>
-        <p:txBody>
-          <a:bodyPr wrap="square" lIns="0" rIns="0" tIns="0" bIns="0" anchor="ctr">
-            <a:spAutoFit/>
-          </a:bodyPr>
-          <a:lstStyle/>
-          <a:p>
-            <a:pPr algn="ctr">
-              <a:spcAft>
-                <a:spcPts val="0"/>
-              </a:spcAft>
-            </a:pPr>
-            <a:r>
-              <a:rPr sz="1200" b="1" i="0">
-                <a:solidFill>
-                  <a:srgbClr val="FFFFFF"/>
-                </a:solidFill>
-                <a:latin typeface="Yu Gothic"/>
-                <a:ea typeface="Yu Gothic"/>
-                <a:cs typeface="Yu Gothic"/>
-              </a:rPr>
-              <a:t>成果の測り方（「資料を作った」ではない）</a:t>
-            </a:r>
-          </a:p>
-        </p:txBody>
-      </p:sp>
-      <p:sp>
-        <p:nvSpPr>
-          <p:cNvPr id="8" name="Oval 7"/>
-          <p:cNvSpPr/>
-          <p:nvPr/>
-        </p:nvSpPr>
-        <p:spPr>
-          <a:xfrm>
-            <a:off x="731520" y="2578608"/>
-            <a:ext cx="310896" cy="310896"/>
-          </a:xfrm>
-          <a:prstGeom prst="ellipse">
+            <a:off x="502920" y="1773936"/>
+            <a:ext cx="64008" cy="868680"/>
+          </a:xfrm>
+          <a:prstGeom prst="rect">
             <a:avLst/>
           </a:prstGeom>
           <a:solidFill>
@@ -8256,79 +9755,23 @@
           </a:fontRef>
         </p:style>
         <p:txBody>
-          <a:bodyPr rtlCol="0" anchor="ctr" wrap="none" lIns="0" rIns="0" tIns="0" bIns="0"/>
-          <a:lstStyle/>
-          <a:p>
-            <a:pPr algn="ctr">
-              <a:spcAft>
-                <a:spcPts val="0"/>
-              </a:spcAft>
-            </a:pPr>
-            <a:r>
-              <a:rPr sz="1200" b="1" i="0">
-                <a:solidFill>
-                  <a:srgbClr val="FFFFFF"/>
-                </a:solidFill>
-                <a:latin typeface="Yu Gothic"/>
-                <a:ea typeface="Yu Gothic"/>
-                <a:cs typeface="Yu Gothic"/>
-              </a:rPr>
-              <a:t>1</a:t>
-            </a:r>
-          </a:p>
-        </p:txBody>
-      </p:sp>
-      <p:sp>
-        <p:nvSpPr>
-          <p:cNvPr id="9" name="TextBox 8"/>
-          <p:cNvSpPr txBox="1"/>
-          <p:nvPr/>
-        </p:nvSpPr>
-        <p:spPr>
-          <a:xfrm>
-            <a:off x="1170432" y="2560320"/>
-            <a:ext cx="4572000" cy="365760"/>
-          </a:xfrm>
-          <a:prstGeom prst="rect">
-            <a:avLst/>
-          </a:prstGeom>
-          <a:noFill/>
-        </p:spPr>
-        <p:txBody>
-          <a:bodyPr wrap="square" lIns="0" rIns="0" tIns="0" bIns="0" anchor="ctr">
-            <a:spAutoFit/>
-          </a:bodyPr>
-          <a:lstStyle/>
-          <a:p>
-            <a:pPr algn="l">
-              <a:spcAft>
-                <a:spcPts val="0"/>
-              </a:spcAft>
-            </a:pPr>
-            <a:r>
-              <a:rPr sz="1200" b="1" i="0">
-                <a:solidFill>
-                  <a:srgbClr val="3A106E"/>
-                </a:solidFill>
-                <a:latin typeface="Yu Gothic"/>
-                <a:ea typeface="Yu Gothic"/>
-                <a:cs typeface="Yu Gothic"/>
-              </a:rPr>
-              <a:t>経営判断が成立した</a:t>
-            </a:r>
-          </a:p>
-        </p:txBody>
-      </p:sp>
-      <p:sp>
-        <p:nvSpPr>
-          <p:cNvPr id="10" name="Oval 9"/>
+          <a:bodyPr rtlCol="0" anchor="ctr"/>
+          <a:lstStyle/>
+          <a:p>
+            <a:pPr algn="ctr"/>
+          </a:p>
+        </p:txBody>
+      </p:sp>
+      <p:sp>
+        <p:nvSpPr>
+          <p:cNvPr id="7" name="Oval 6"/>
           <p:cNvSpPr/>
           <p:nvPr/>
         </p:nvSpPr>
         <p:spPr>
           <a:xfrm>
-            <a:off x="731520" y="2944368"/>
-            <a:ext cx="310896" cy="310896"/>
+            <a:off x="722376" y="1979676"/>
+            <a:ext cx="457200" cy="457200"/>
           </a:xfrm>
           <a:prstGeom prst="ellipse">
             <a:avLst/>
@@ -8365,7 +9808,7 @@
               </a:spcAft>
             </a:pPr>
             <a:r>
-              <a:rPr sz="1200" b="1" i="0">
+              <a:rPr sz="1800" b="1" i="0">
                 <a:solidFill>
                   <a:srgbClr val="FFFFFF"/>
                 </a:solidFill>
@@ -8373,21 +9816,21 @@
                 <a:ea typeface="Yu Gothic"/>
                 <a:cs typeface="Yu Gothic"/>
               </a:rPr>
-              <a:t>2</a:t>
-            </a:r>
-          </a:p>
-        </p:txBody>
-      </p:sp>
-      <p:sp>
-        <p:nvSpPr>
-          <p:cNvPr id="11" name="TextBox 10"/>
+              <a:t>1</a:t>
+            </a:r>
+          </a:p>
+        </p:txBody>
+      </p:sp>
+      <p:sp>
+        <p:nvSpPr>
+          <p:cNvPr id="8" name="TextBox 7"/>
           <p:cNvSpPr txBox="1"/>
           <p:nvPr/>
         </p:nvSpPr>
         <p:spPr>
           <a:xfrm>
-            <a:off x="1170432" y="2926080"/>
-            <a:ext cx="4572000" cy="365760"/>
+            <a:off x="1362456" y="1920240"/>
+            <a:ext cx="10122408" cy="612648"/>
           </a:xfrm>
           <a:prstGeom prst="rect">
             <a:avLst/>
@@ -8399,6 +9842,24 @@
             <a:spAutoFit/>
           </a:bodyPr>
           <a:lstStyle/>
+          <a:p>
+            <a:pPr algn="l">
+              <a:spcAft>
+                <a:spcPts val="400"/>
+              </a:spcAft>
+            </a:pPr>
+            <a:r>
+              <a:rPr sz="1300" b="1" i="0">
+                <a:solidFill>
+                  <a:srgbClr val="3A106E"/>
+                </a:solidFill>
+                <a:latin typeface="Yu Gothic"/>
+                <a:ea typeface="Yu Gothic"/>
+                <a:cs typeface="Yu Gothic"/>
+              </a:rPr>
+              <a:t>経営判断を成立させる</a:t>
+            </a:r>
+          </a:p>
           <a:p>
             <a:pPr algn="l">
               <a:spcAft>
@@ -8406,229 +9867,29 @@
               </a:spcAft>
             </a:pPr>
             <a:r>
-              <a:rPr sz="1200" b="1" i="0">
-                <a:solidFill>
-                  <a:srgbClr val="3A106E"/>
+              <a:rPr sz="1000" b="0" i="0">
+                <a:solidFill>
+                  <a:srgbClr val="262630"/>
                 </a:solidFill>
                 <a:latin typeface="Yu Gothic"/>
                 <a:ea typeface="Yu Gothic"/>
                 <a:cs typeface="Yu Gothic"/>
               </a:rPr>
-              <a:t>業務が変わった</a:t>
-            </a:r>
-          </a:p>
-        </p:txBody>
-      </p:sp>
-      <p:sp>
-        <p:nvSpPr>
-          <p:cNvPr id="12" name="Oval 11"/>
+              <a:t>論点を「1ページ意思決定書」（問い→選択肢→推奨）に仕上げ、戦略会議・点検会議で決定まで持ち込む。論点発生から経営判断まで原則5営業日以内</a:t>
+            </a:r>
+          </a:p>
+        </p:txBody>
+      </p:sp>
+      <p:sp>
+        <p:nvSpPr>
+          <p:cNvPr id="9" name="Rectangle 8"/>
           <p:cNvSpPr/>
           <p:nvPr/>
         </p:nvSpPr>
         <p:spPr>
           <a:xfrm>
-            <a:off x="731520" y="3310128"/>
-            <a:ext cx="310896" cy="310896"/>
-          </a:xfrm>
-          <a:prstGeom prst="ellipse">
-            <a:avLst/>
-          </a:prstGeom>
-          <a:solidFill>
-            <a:srgbClr val="7823DC"/>
-          </a:solidFill>
-          <a:ln>
-            <a:noFill/>
-          </a:ln>
-          <a:effectLst/>
-        </p:spPr>
-        <p:style>
-          <a:lnRef idx="1">
-            <a:schemeClr val="accent1"/>
-          </a:lnRef>
-          <a:fillRef idx="3">
-            <a:schemeClr val="accent1"/>
-          </a:fillRef>
-          <a:effectRef idx="2">
-            <a:schemeClr val="accent1"/>
-          </a:effectRef>
-          <a:fontRef idx="minor">
-            <a:schemeClr val="lt1"/>
-          </a:fontRef>
-        </p:style>
-        <p:txBody>
-          <a:bodyPr rtlCol="0" anchor="ctr" wrap="none" lIns="0" rIns="0" tIns="0" bIns="0"/>
-          <a:lstStyle/>
-          <a:p>
-            <a:pPr algn="ctr">
-              <a:spcAft>
-                <a:spcPts val="0"/>
-              </a:spcAft>
-            </a:pPr>
-            <a:r>
-              <a:rPr sz="1200" b="1" i="0">
-                <a:solidFill>
-                  <a:srgbClr val="FFFFFF"/>
-                </a:solidFill>
-                <a:latin typeface="Yu Gothic"/>
-                <a:ea typeface="Yu Gothic"/>
-                <a:cs typeface="Yu Gothic"/>
-              </a:rPr>
-              <a:t>3</a:t>
-            </a:r>
-          </a:p>
-        </p:txBody>
-      </p:sp>
-      <p:sp>
-        <p:nvSpPr>
-          <p:cNvPr id="13" name="TextBox 12"/>
-          <p:cNvSpPr txBox="1"/>
-          <p:nvPr/>
-        </p:nvSpPr>
-        <p:spPr>
-          <a:xfrm>
-            <a:off x="1170432" y="3291840"/>
-            <a:ext cx="4572000" cy="365760"/>
-          </a:xfrm>
-          <a:prstGeom prst="rect">
-            <a:avLst/>
-          </a:prstGeom>
-          <a:noFill/>
-        </p:spPr>
-        <p:txBody>
-          <a:bodyPr wrap="square" lIns="0" rIns="0" tIns="0" bIns="0" anchor="ctr">
-            <a:spAutoFit/>
-          </a:bodyPr>
-          <a:lstStyle/>
-          <a:p>
-            <a:pPr algn="l">
-              <a:spcAft>
-                <a:spcPts val="0"/>
-              </a:spcAft>
-            </a:pPr>
-            <a:r>
-              <a:rPr sz="1200" b="1" i="0">
-                <a:solidFill>
-                  <a:srgbClr val="3A106E"/>
-                </a:solidFill>
-                <a:latin typeface="Yu Gothic"/>
-                <a:ea typeface="Yu Gothic"/>
-                <a:cs typeface="Yu Gothic"/>
-              </a:rPr>
-              <a:t>部門が自走した</a:t>
-            </a:r>
-          </a:p>
-        </p:txBody>
-      </p:sp>
-      <p:sp>
-        <p:nvSpPr>
-          <p:cNvPr id="14" name="Oval 13"/>
-          <p:cNvSpPr/>
-          <p:nvPr/>
-        </p:nvSpPr>
-        <p:spPr>
-          <a:xfrm>
-            <a:off x="731520" y="3675888"/>
-            <a:ext cx="310896" cy="310896"/>
-          </a:xfrm>
-          <a:prstGeom prst="ellipse">
-            <a:avLst/>
-          </a:prstGeom>
-          <a:solidFill>
-            <a:srgbClr val="7823DC"/>
-          </a:solidFill>
-          <a:ln>
-            <a:noFill/>
-          </a:ln>
-          <a:effectLst/>
-        </p:spPr>
-        <p:style>
-          <a:lnRef idx="1">
-            <a:schemeClr val="accent1"/>
-          </a:lnRef>
-          <a:fillRef idx="3">
-            <a:schemeClr val="accent1"/>
-          </a:fillRef>
-          <a:effectRef idx="2">
-            <a:schemeClr val="accent1"/>
-          </a:effectRef>
-          <a:fontRef idx="minor">
-            <a:schemeClr val="lt1"/>
-          </a:fontRef>
-        </p:style>
-        <p:txBody>
-          <a:bodyPr rtlCol="0" anchor="ctr" wrap="none" lIns="0" rIns="0" tIns="0" bIns="0"/>
-          <a:lstStyle/>
-          <a:p>
-            <a:pPr algn="ctr">
-              <a:spcAft>
-                <a:spcPts val="0"/>
-              </a:spcAft>
-            </a:pPr>
-            <a:r>
-              <a:rPr sz="1200" b="1" i="0">
-                <a:solidFill>
-                  <a:srgbClr val="FFFFFF"/>
-                </a:solidFill>
-                <a:latin typeface="Yu Gothic"/>
-                <a:ea typeface="Yu Gothic"/>
-                <a:cs typeface="Yu Gothic"/>
-              </a:rPr>
-              <a:t>4</a:t>
-            </a:r>
-          </a:p>
-        </p:txBody>
-      </p:sp>
-      <p:sp>
-        <p:nvSpPr>
-          <p:cNvPr id="15" name="TextBox 14"/>
-          <p:cNvSpPr txBox="1"/>
-          <p:nvPr/>
-        </p:nvSpPr>
-        <p:spPr>
-          <a:xfrm>
-            <a:off x="1170432" y="3657600"/>
-            <a:ext cx="4572000" cy="365760"/>
-          </a:xfrm>
-          <a:prstGeom prst="rect">
-            <a:avLst/>
-          </a:prstGeom>
-          <a:noFill/>
-        </p:spPr>
-        <p:txBody>
-          <a:bodyPr wrap="square" lIns="0" rIns="0" tIns="0" bIns="0" anchor="ctr">
-            <a:spAutoFit/>
-          </a:bodyPr>
-          <a:lstStyle/>
-          <a:p>
-            <a:pPr algn="l">
-              <a:spcAft>
-                <a:spcPts val="0"/>
-              </a:spcAft>
-            </a:pPr>
-            <a:r>
-              <a:rPr sz="1200" b="1" i="0">
-                <a:solidFill>
-                  <a:srgbClr val="3A106E"/>
-                </a:solidFill>
-                <a:latin typeface="Yu Gothic"/>
-                <a:ea typeface="Yu Gothic"/>
-                <a:cs typeface="Yu Gothic"/>
-              </a:rPr>
-              <a:t>数字が改善した</a:t>
-            </a:r>
-          </a:p>
-        </p:txBody>
-      </p:sp>
-      <p:sp>
-        <p:nvSpPr>
-          <p:cNvPr id="16" name="Rectangle 15"/>
-          <p:cNvSpPr/>
-          <p:nvPr/>
-        </p:nvSpPr>
-        <p:spPr>
-          <a:xfrm>
-            <a:off x="6199632" y="1956816"/>
-            <a:ext cx="5486400" cy="2103120"/>
+            <a:off x="502920" y="2752344"/>
+            <a:ext cx="11183112" cy="868680"/>
           </a:xfrm>
           <a:prstGeom prst="rect">
             <a:avLst/>
@@ -8667,14 +9928,14 @@
       </p:sp>
       <p:sp>
         <p:nvSpPr>
-          <p:cNvPr id="17" name="Rectangle 16"/>
+          <p:cNvPr id="10" name="Rectangle 9"/>
           <p:cNvSpPr/>
           <p:nvPr/>
         </p:nvSpPr>
         <p:spPr>
           <a:xfrm>
-            <a:off x="6199632" y="1956816"/>
-            <a:ext cx="5486400" cy="457200"/>
+            <a:off x="502920" y="2752344"/>
+            <a:ext cx="64008" cy="868680"/>
           </a:xfrm>
           <a:prstGeom prst="rect">
             <a:avLst/>
@@ -8711,24 +9972,42 @@
       </p:sp>
       <p:sp>
         <p:nvSpPr>
-          <p:cNvPr id="18" name="TextBox 17"/>
-          <p:cNvSpPr txBox="1"/>
-          <p:nvPr/>
-        </p:nvSpPr>
-        <p:spPr>
-          <a:xfrm>
-            <a:off x="6199632" y="1956816"/>
-            <a:ext cx="5486400" cy="457200"/>
-          </a:xfrm>
-          <a:prstGeom prst="rect">
-            <a:avLst/>
-          </a:prstGeom>
-          <a:noFill/>
-        </p:spPr>
-        <p:txBody>
-          <a:bodyPr wrap="square" lIns="0" rIns="0" tIns="0" bIns="0" anchor="ctr">
-            <a:spAutoFit/>
-          </a:bodyPr>
+          <p:cNvPr id="11" name="Oval 10"/>
+          <p:cNvSpPr/>
+          <p:nvPr/>
+        </p:nvSpPr>
+        <p:spPr>
+          <a:xfrm>
+            <a:off x="722376" y="2958084"/>
+            <a:ext cx="457200" cy="457200"/>
+          </a:xfrm>
+          <a:prstGeom prst="ellipse">
+            <a:avLst/>
+          </a:prstGeom>
+          <a:solidFill>
+            <a:srgbClr val="7823DC"/>
+          </a:solidFill>
+          <a:ln>
+            <a:noFill/>
+          </a:ln>
+          <a:effectLst/>
+        </p:spPr>
+        <p:style>
+          <a:lnRef idx="1">
+            <a:schemeClr val="accent1"/>
+          </a:lnRef>
+          <a:fillRef idx="3">
+            <a:schemeClr val="accent1"/>
+          </a:fillRef>
+          <a:effectRef idx="2">
+            <a:schemeClr val="accent1"/>
+          </a:effectRef>
+          <a:fontRef idx="minor">
+            <a:schemeClr val="lt1"/>
+          </a:fontRef>
+        </p:style>
+        <p:txBody>
+          <a:bodyPr rtlCol="0" anchor="ctr" wrap="none" lIns="0" rIns="0" tIns="0" bIns="0"/>
           <a:lstStyle/>
           <a:p>
             <a:pPr algn="ctr">
@@ -8737,7 +10016,7 @@
               </a:spcAft>
             </a:pPr>
             <a:r>
-              <a:rPr sz="1200" b="1" i="0">
+              <a:rPr sz="1800" b="1" i="0">
                 <a:solidFill>
                   <a:srgbClr val="FFFFFF"/>
                 </a:solidFill>
@@ -8745,21 +10024,21 @@
                 <a:ea typeface="Yu Gothic"/>
                 <a:cs typeface="Yu Gothic"/>
               </a:rPr>
-              <a:t>やらないこと</a:t>
-            </a:r>
-          </a:p>
-        </p:txBody>
-      </p:sp>
-      <p:sp>
-        <p:nvSpPr>
-          <p:cNvPr id="19" name="TextBox 18"/>
+              <a:t>2</a:t>
+            </a:r>
+          </a:p>
+        </p:txBody>
+      </p:sp>
+      <p:sp>
+        <p:nvSpPr>
+          <p:cNvPr id="12" name="TextBox 11"/>
           <p:cNvSpPr txBox="1"/>
           <p:nvPr/>
         </p:nvSpPr>
         <p:spPr>
           <a:xfrm>
-            <a:off x="6473952" y="2596896"/>
-            <a:ext cx="4937760" cy="1371600"/>
+            <a:off x="1362456" y="2898648"/>
+            <a:ext cx="10122408" cy="612648"/>
           </a:xfrm>
           <a:prstGeom prst="rect">
             <a:avLst/>
@@ -8767,20 +10046,18 @@
           <a:noFill/>
         </p:spPr>
         <p:txBody>
-          <a:bodyPr wrap="square" lIns="0" rIns="0" tIns="0" bIns="0">
+          <a:bodyPr wrap="square" lIns="0" rIns="0" tIns="0" bIns="0" anchor="ctr">
             <a:spAutoFit/>
           </a:bodyPr>
           <a:lstStyle/>
           <a:p>
             <a:pPr algn="l">
               <a:spcAft>
-                <a:spcPts val="600"/>
+                <a:spcPts val="400"/>
               </a:spcAft>
-              <a:buFont typeface="Arial"/>
-              <a:buChar char="✕"/>
             </a:pPr>
             <a:r>
-              <a:rPr sz="1200" b="1" i="0">
+              <a:rPr sz="1300" b="1" i="0">
                 <a:solidFill>
                   <a:srgbClr val="3A106E"/>
                 </a:solidFill>
@@ -8788,27 +10065,7 @@
                 <a:ea typeface="Yu Gothic"/>
                 <a:cs typeface="Yu Gothic"/>
               </a:rPr>
-              <a:t>データ加工</a:t>
-            </a:r>
-          </a:p>
-          <a:p>
-            <a:pPr algn="l">
-              <a:spcAft>
-                <a:spcPts val="1000"/>
-              </a:spcAft>
-              <a:buFont typeface="Arial"/>
-              <a:buChar char="✕"/>
-            </a:pPr>
-            <a:r>
-              <a:rPr sz="1200" b="1" i="0">
-                <a:solidFill>
-                  <a:srgbClr val="3A106E"/>
-                </a:solidFill>
-                <a:latin typeface="Yu Gothic"/>
-                <a:ea typeface="Yu Gothic"/>
-                <a:cs typeface="Yu Gothic"/>
-              </a:rPr>
-              <a:t>議事録</a:t>
+              <a:t>業務を変えて、部門に移管する</a:t>
             </a:r>
           </a:p>
           <a:p>
@@ -8818,7 +10075,7 @@
               </a:spcAft>
             </a:pPr>
             <a:r>
-              <a:rPr sz="1050" b="0" i="0">
+              <a:rPr sz="1000" b="0" i="0">
                 <a:solidFill>
                   <a:srgbClr val="262630"/>
                 </a:solidFill>
@@ -8826,27 +10083,73 @@
                 <a:ea typeface="Yu Gothic"/>
                 <a:cs typeface="Yu Gothic"/>
               </a:rPr>
-              <a:t>→ 坪井さんの実行統制とレビューし合う関係</a:t>
-            </a:r>
-          </a:p>
-        </p:txBody>
-      </p:sp>
-      <p:sp>
-        <p:nvSpPr>
-          <p:cNvPr id="20" name="Rectangle 19"/>
+              <a:t>プロセス再設計とパイロット（1部門・2〜4週・数字で前後比較）。移管が完了して初めて成果——「資料を作った」は成果に数えない</a:t>
+            </a:r>
+          </a:p>
+        </p:txBody>
+      </p:sp>
+      <p:sp>
+        <p:nvSpPr>
+          <p:cNvPr id="13" name="Rectangle 12"/>
           <p:cNvSpPr/>
           <p:nvPr/>
         </p:nvSpPr>
         <p:spPr>
           <a:xfrm>
-            <a:off x="502920" y="5285232"/>
-            <a:ext cx="11183112" cy="914400"/>
+            <a:off x="502920" y="3730752"/>
+            <a:ext cx="11183112" cy="868680"/>
           </a:xfrm>
           <a:prstGeom prst="rect">
             <a:avLst/>
           </a:prstGeom>
           <a:solidFill>
-            <a:srgbClr val="F3EFFB"/>
+            <a:srgbClr val="FFFFFF"/>
+          </a:solidFill>
+          <a:ln w="9525">
+            <a:solidFill>
+              <a:srgbClr val="D9D9E0"/>
+            </a:solidFill>
+          </a:ln>
+          <a:effectLst/>
+        </p:spPr>
+        <p:style>
+          <a:lnRef idx="1">
+            <a:schemeClr val="accent1"/>
+          </a:lnRef>
+          <a:fillRef idx="3">
+            <a:schemeClr val="accent1"/>
+          </a:fillRef>
+          <a:effectRef idx="2">
+            <a:schemeClr val="accent1"/>
+          </a:effectRef>
+          <a:fontRef idx="minor">
+            <a:schemeClr val="lt1"/>
+          </a:fontRef>
+        </p:style>
+        <p:txBody>
+          <a:bodyPr rtlCol="0" anchor="ctr"/>
+          <a:lstStyle/>
+          <a:p>
+            <a:pPr algn="ctr"/>
+          </a:p>
+        </p:txBody>
+      </p:sp>
+      <p:sp>
+        <p:nvSpPr>
+          <p:cNvPr id="14" name="Rectangle 13"/>
+          <p:cNvSpPr/>
+          <p:nvPr/>
+        </p:nvSpPr>
+        <p:spPr>
+          <a:xfrm>
+            <a:off x="502920" y="3730752"/>
+            <a:ext cx="64008" cy="868680"/>
+          </a:xfrm>
+          <a:prstGeom prst="rect">
+            <a:avLst/>
+          </a:prstGeom>
+          <a:solidFill>
+            <a:srgbClr val="7823DC"/>
           </a:solidFill>
           <a:ln>
             <a:noFill/>
@@ -8877,14 +10180,340 @@
       </p:sp>
       <p:sp>
         <p:nvSpPr>
+          <p:cNvPr id="15" name="Oval 14"/>
+          <p:cNvSpPr/>
+          <p:nvPr/>
+        </p:nvSpPr>
+        <p:spPr>
+          <a:xfrm>
+            <a:off x="722376" y="3936492"/>
+            <a:ext cx="457200" cy="457200"/>
+          </a:xfrm>
+          <a:prstGeom prst="ellipse">
+            <a:avLst/>
+          </a:prstGeom>
+          <a:solidFill>
+            <a:srgbClr val="7823DC"/>
+          </a:solidFill>
+          <a:ln>
+            <a:noFill/>
+          </a:ln>
+          <a:effectLst/>
+        </p:spPr>
+        <p:style>
+          <a:lnRef idx="1">
+            <a:schemeClr val="accent1"/>
+          </a:lnRef>
+          <a:fillRef idx="3">
+            <a:schemeClr val="accent1"/>
+          </a:fillRef>
+          <a:effectRef idx="2">
+            <a:schemeClr val="accent1"/>
+          </a:effectRef>
+          <a:fontRef idx="minor">
+            <a:schemeClr val="lt1"/>
+          </a:fontRef>
+        </p:style>
+        <p:txBody>
+          <a:bodyPr rtlCol="0" anchor="ctr" wrap="none" lIns="0" rIns="0" tIns="0" bIns="0"/>
+          <a:lstStyle/>
+          <a:p>
+            <a:pPr algn="ctr">
+              <a:spcAft>
+                <a:spcPts val="0"/>
+              </a:spcAft>
+            </a:pPr>
+            <a:r>
+              <a:rPr sz="1800" b="1" i="0">
+                <a:solidFill>
+                  <a:srgbClr val="FFFFFF"/>
+                </a:solidFill>
+                <a:latin typeface="Yu Gothic"/>
+                <a:ea typeface="Yu Gothic"/>
+                <a:cs typeface="Yu Gothic"/>
+              </a:rPr>
+              <a:t>3</a:t>
+            </a:r>
+          </a:p>
+        </p:txBody>
+      </p:sp>
+      <p:sp>
+        <p:nvSpPr>
+          <p:cNvPr id="16" name="TextBox 15"/>
+          <p:cNvSpPr txBox="1"/>
+          <p:nvPr/>
+        </p:nvSpPr>
+        <p:spPr>
+          <a:xfrm>
+            <a:off x="1362456" y="3877056"/>
+            <a:ext cx="10122408" cy="612648"/>
+          </a:xfrm>
+          <a:prstGeom prst="rect">
+            <a:avLst/>
+          </a:prstGeom>
+          <a:noFill/>
+        </p:spPr>
+        <p:txBody>
+          <a:bodyPr wrap="square" lIns="0" rIns="0" tIns="0" bIns="0" anchor="ctr">
+            <a:spAutoFit/>
+          </a:bodyPr>
+          <a:lstStyle/>
+          <a:p>
+            <a:pPr algn="l">
+              <a:spcAft>
+                <a:spcPts val="400"/>
+              </a:spcAft>
+            </a:pPr>
+            <a:r>
+              <a:rPr sz="1300" b="1" i="0">
+                <a:solidFill>
+                  <a:srgbClr val="3A106E"/>
+                </a:solidFill>
+                <a:latin typeface="Yu Gothic"/>
+                <a:ea typeface="Yu Gothic"/>
+                <a:cs typeface="Yu Gothic"/>
+              </a:rPr>
+              <a:t>部門横断の合意形成の推進役</a:t>
+            </a:r>
+          </a:p>
+          <a:p>
+            <a:pPr algn="l">
+              <a:spcAft>
+                <a:spcPts val="0"/>
+              </a:spcAft>
+            </a:pPr>
+            <a:r>
+              <a:rPr sz="1000" b="0" i="0">
+                <a:solidFill>
+                  <a:srgbClr val="262630"/>
+                </a:solidFill>
+                <a:latin typeface="Yu Gothic"/>
+                <a:ea typeface="Yu Gothic"/>
+                <a:cs typeface="Yu Gothic"/>
+              </a:rPr>
+              <a:t>部長間の利害がぶつかる論点を「基準の議論」に翻訳して前に進める</a:t>
+            </a:r>
+          </a:p>
+        </p:txBody>
+      </p:sp>
+      <p:sp>
+        <p:nvSpPr>
+          <p:cNvPr id="17" name="Rectangle 16"/>
+          <p:cNvSpPr/>
+          <p:nvPr/>
+        </p:nvSpPr>
+        <p:spPr>
+          <a:xfrm>
+            <a:off x="502920" y="4709160"/>
+            <a:ext cx="11183112" cy="868680"/>
+          </a:xfrm>
+          <a:prstGeom prst="rect">
+            <a:avLst/>
+          </a:prstGeom>
+          <a:solidFill>
+            <a:srgbClr val="FFFFFF"/>
+          </a:solidFill>
+          <a:ln w="9525">
+            <a:solidFill>
+              <a:srgbClr val="D9D9E0"/>
+            </a:solidFill>
+          </a:ln>
+          <a:effectLst/>
+        </p:spPr>
+        <p:style>
+          <a:lnRef idx="1">
+            <a:schemeClr val="accent1"/>
+          </a:lnRef>
+          <a:fillRef idx="3">
+            <a:schemeClr val="accent1"/>
+          </a:fillRef>
+          <a:effectRef idx="2">
+            <a:schemeClr val="accent1"/>
+          </a:effectRef>
+          <a:fontRef idx="minor">
+            <a:schemeClr val="lt1"/>
+          </a:fontRef>
+        </p:style>
+        <p:txBody>
+          <a:bodyPr rtlCol="0" anchor="ctr"/>
+          <a:lstStyle/>
+          <a:p>
+            <a:pPr algn="ctr"/>
+          </a:p>
+        </p:txBody>
+      </p:sp>
+      <p:sp>
+        <p:nvSpPr>
+          <p:cNvPr id="18" name="Rectangle 17"/>
+          <p:cNvSpPr/>
+          <p:nvPr/>
+        </p:nvSpPr>
+        <p:spPr>
+          <a:xfrm>
+            <a:off x="502920" y="4709160"/>
+            <a:ext cx="64008" cy="868680"/>
+          </a:xfrm>
+          <a:prstGeom prst="rect">
+            <a:avLst/>
+          </a:prstGeom>
+          <a:solidFill>
+            <a:srgbClr val="7823DC"/>
+          </a:solidFill>
+          <a:ln>
+            <a:noFill/>
+          </a:ln>
+          <a:effectLst/>
+        </p:spPr>
+        <p:style>
+          <a:lnRef idx="1">
+            <a:schemeClr val="accent1"/>
+          </a:lnRef>
+          <a:fillRef idx="3">
+            <a:schemeClr val="accent1"/>
+          </a:fillRef>
+          <a:effectRef idx="2">
+            <a:schemeClr val="accent1"/>
+          </a:effectRef>
+          <a:fontRef idx="minor">
+            <a:schemeClr val="lt1"/>
+          </a:fontRef>
+        </p:style>
+        <p:txBody>
+          <a:bodyPr rtlCol="0" anchor="ctr"/>
+          <a:lstStyle/>
+          <a:p>
+            <a:pPr algn="ctr"/>
+          </a:p>
+        </p:txBody>
+      </p:sp>
+      <p:sp>
+        <p:nvSpPr>
+          <p:cNvPr id="19" name="Oval 18"/>
+          <p:cNvSpPr/>
+          <p:nvPr/>
+        </p:nvSpPr>
+        <p:spPr>
+          <a:xfrm>
+            <a:off x="722376" y="4914900"/>
+            <a:ext cx="457200" cy="457200"/>
+          </a:xfrm>
+          <a:prstGeom prst="ellipse">
+            <a:avLst/>
+          </a:prstGeom>
+          <a:solidFill>
+            <a:srgbClr val="7823DC"/>
+          </a:solidFill>
+          <a:ln>
+            <a:noFill/>
+          </a:ln>
+          <a:effectLst/>
+        </p:spPr>
+        <p:style>
+          <a:lnRef idx="1">
+            <a:schemeClr val="accent1"/>
+          </a:lnRef>
+          <a:fillRef idx="3">
+            <a:schemeClr val="accent1"/>
+          </a:fillRef>
+          <a:effectRef idx="2">
+            <a:schemeClr val="accent1"/>
+          </a:effectRef>
+          <a:fontRef idx="minor">
+            <a:schemeClr val="lt1"/>
+          </a:fontRef>
+        </p:style>
+        <p:txBody>
+          <a:bodyPr rtlCol="0" anchor="ctr" wrap="none" lIns="0" rIns="0" tIns="0" bIns="0"/>
+          <a:lstStyle/>
+          <a:p>
+            <a:pPr algn="ctr">
+              <a:spcAft>
+                <a:spcPts val="0"/>
+              </a:spcAft>
+            </a:pPr>
+            <a:r>
+              <a:rPr sz="1800" b="1" i="0">
+                <a:solidFill>
+                  <a:srgbClr val="FFFFFF"/>
+                </a:solidFill>
+                <a:latin typeface="Yu Gothic"/>
+                <a:ea typeface="Yu Gothic"/>
+                <a:cs typeface="Yu Gothic"/>
+              </a:rPr>
+              <a:t>4</a:t>
+            </a:r>
+          </a:p>
+        </p:txBody>
+      </p:sp>
+      <p:sp>
+        <p:nvSpPr>
+          <p:cNvPr id="20" name="TextBox 19"/>
+          <p:cNvSpPr txBox="1"/>
+          <p:nvPr/>
+        </p:nvSpPr>
+        <p:spPr>
+          <a:xfrm>
+            <a:off x="1362456" y="4855464"/>
+            <a:ext cx="10122408" cy="612648"/>
+          </a:xfrm>
+          <a:prstGeom prst="rect">
+            <a:avLst/>
+          </a:prstGeom>
+          <a:noFill/>
+        </p:spPr>
+        <p:txBody>
+          <a:bodyPr wrap="square" lIns="0" rIns="0" tIns="0" bIns="0" anchor="ctr">
+            <a:spAutoFit/>
+          </a:bodyPr>
+          <a:lstStyle/>
+          <a:p>
+            <a:pPr algn="l">
+              <a:spcAft>
+                <a:spcPts val="400"/>
+              </a:spcAft>
+            </a:pPr>
+            <a:r>
+              <a:rPr sz="1300" b="1" i="0">
+                <a:solidFill>
+                  <a:srgbClr val="3A106E"/>
+                </a:solidFill>
+                <a:latin typeface="Yu Gothic"/>
+                <a:ea typeface="Yu Gothic"/>
+                <a:cs typeface="Yu Gothic"/>
+              </a:rPr>
+              <a:t>外から来た目で「これはおかしい」と言う</a:t>
+            </a:r>
+          </a:p>
+          <a:p>
+            <a:pPr algn="l">
+              <a:spcAft>
+                <a:spcPts val="0"/>
+              </a:spcAft>
+            </a:pPr>
+            <a:r>
+              <a:rPr sz="1000" b="0" i="0">
+                <a:solidFill>
+                  <a:srgbClr val="262630"/>
+                </a:solidFill>
+                <a:latin typeface="Yu Gothic"/>
+                <a:ea typeface="Yu Gothic"/>
+                <a:cs typeface="Yu Gothic"/>
+              </a:rPr>
+              <a:t>社内の常識に染まっていないことが最大の武器。それを言ってもらうための専任</a:t>
+            </a:r>
+          </a:p>
+        </p:txBody>
+      </p:sp>
+      <p:sp>
+        <p:nvSpPr>
           <p:cNvPr id="21" name="Rectangle 20"/>
           <p:cNvSpPr/>
           <p:nvPr/>
         </p:nvSpPr>
         <p:spPr>
           <a:xfrm>
-            <a:off x="502920" y="5285232"/>
-            <a:ext cx="38100" cy="914400"/>
+            <a:off x="502920" y="5669280"/>
+            <a:ext cx="11183112" cy="676656"/>
           </a:xfrm>
           <a:prstGeom prst="rect">
             <a:avLst/>
@@ -8921,14 +10550,58 @@
       </p:sp>
       <p:sp>
         <p:nvSpPr>
-          <p:cNvPr id="22" name="TextBox 21"/>
+          <p:cNvPr id="22" name="Rectangle 21"/>
+          <p:cNvSpPr/>
+          <p:nvPr/>
+        </p:nvSpPr>
+        <p:spPr>
+          <a:xfrm>
+            <a:off x="502920" y="5669280"/>
+            <a:ext cx="38100" cy="676656"/>
+          </a:xfrm>
+          <a:prstGeom prst="rect">
+            <a:avLst/>
+          </a:prstGeom>
+          <a:solidFill>
+            <a:srgbClr val="7823DC"/>
+          </a:solidFill>
+          <a:ln>
+            <a:noFill/>
+          </a:ln>
+          <a:effectLst/>
+        </p:spPr>
+        <p:style>
+          <a:lnRef idx="1">
+            <a:schemeClr val="accent1"/>
+          </a:lnRef>
+          <a:fillRef idx="3">
+            <a:schemeClr val="accent1"/>
+          </a:fillRef>
+          <a:effectRef idx="2">
+            <a:schemeClr val="accent1"/>
+          </a:effectRef>
+          <a:fontRef idx="minor">
+            <a:schemeClr val="lt1"/>
+          </a:fontRef>
+        </p:style>
+        <p:txBody>
+          <a:bodyPr rtlCol="0" anchor="ctr"/>
+          <a:lstStyle/>
+          <a:p>
+            <a:pPr algn="ctr"/>
+          </a:p>
+        </p:txBody>
+      </p:sp>
+      <p:sp>
+        <p:nvSpPr>
+          <p:cNvPr id="23" name="TextBox 22"/>
           <p:cNvSpPr txBox="1"/>
           <p:nvPr/>
         </p:nvSpPr>
         <p:spPr>
           <a:xfrm>
-            <a:off x="713232" y="5340096"/>
-            <a:ext cx="10835640" cy="804672"/>
+            <a:off x="777240" y="5742432"/>
+            <a:ext cx="10698480" cy="530352"/>
           </a:xfrm>
           <a:prstGeom prst="rect">
             <a:avLst/>
@@ -8949,31 +10622,20 @@
             <a:r>
               <a:rPr sz="1100" b="1" i="0">
                 <a:solidFill>
-                  <a:srgbClr val="7823DC"/>
+                  <a:srgbClr val="FFFFFF"/>
                 </a:solidFill>
                 <a:latin typeface="Yu Gothic"/>
                 <a:ea typeface="Yu Gothic"/>
                 <a:cs typeface="Yu Gothic"/>
               </a:rPr>
-              <a:t>原則　一人が作り、もう一人がレビューする　</a:t>
-            </a:r>
-            <a:r>
-              <a:rPr sz="1100" b="0" i="0">
-                <a:solidFill>
-                  <a:srgbClr val="262630"/>
-                </a:solidFill>
-                <a:latin typeface="Yu Gothic"/>
-                <a:ea typeface="Yu Gothic"/>
-                <a:cs typeface="Yu Gothic"/>
-              </a:rPr>
-              <a:t>小沢さんが作り、坪井さんがレビューする。逆もまた然り。二人で品質を担保する体制です。</a:t>
-            </a:r>
-          </a:p>
-        </p:txBody>
-      </p:sp>
-      <p:sp>
-        <p:nvSpPr>
-          <p:cNvPr id="23" name="Rectangle 22"/>
+              <a:t>データ加工と議事録はやりません。坪井さん（統制）と「一人が作り、もう一人がレビューする」の関係です。</a:t>
+            </a:r>
+          </a:p>
+        </p:txBody>
+      </p:sp>
+      <p:sp>
+        <p:nvSpPr>
+          <p:cNvPr id="24" name="Rectangle 23"/>
           <p:cNvSpPr/>
           <p:nvPr/>
         </p:nvSpPr>
@@ -9017,7 +10679,7 @@
       </p:sp>
       <p:sp>
         <p:nvSpPr>
-          <p:cNvPr id="24" name="TextBox 23"/>
+          <p:cNvPr id="25" name="TextBox 24"/>
           <p:cNvSpPr txBox="1"/>
           <p:nvPr/>
         </p:nvSpPr>
@@ -9058,7 +10720,7 @@
       </p:sp>
       <p:sp>
         <p:nvSpPr>
-          <p:cNvPr id="25" name="TextBox 24"/>
+          <p:cNvPr id="26" name="TextBox 25"/>
           <p:cNvSpPr txBox="1"/>
           <p:nvPr/>
         </p:nvSpPr>
@@ -9106,6 +10768,1569 @@
 </file>
 
 <file path=ppt/slides/slide7.xml><?xml version="1.0" encoding="utf-8"?>
+<p:sld xmlns:a="http://schemas.openxmlformats.org/drawingml/2006/main" xmlns:p="http://schemas.openxmlformats.org/presentationml/2006/main" xmlns:r="http://schemas.openxmlformats.org/officeDocument/2006/relationships">
+  <p:cSld>
+    <p:spTree>
+      <p:nvGrpSpPr>
+        <p:cNvPr id="1" name=""/>
+        <p:cNvGrpSpPr/>
+        <p:nvPr/>
+      </p:nvGrpSpPr>
+      <p:grpSpPr/>
+      <p:sp>
+        <p:nvSpPr>
+          <p:cNvPr id="2" name="TextBox 1"/>
+          <p:cNvSpPr txBox="1"/>
+          <p:nvPr/>
+        </p:nvSpPr>
+        <p:spPr>
+          <a:xfrm>
+            <a:off x="502920" y="256032"/>
+            <a:ext cx="11155680" cy="256032"/>
+          </a:xfrm>
+          <a:prstGeom prst="rect">
+            <a:avLst/>
+          </a:prstGeom>
+          <a:noFill/>
+        </p:spPr>
+        <p:txBody>
+          <a:bodyPr wrap="square" lIns="0" rIns="0" tIns="0" bIns="0">
+            <a:spAutoFit/>
+          </a:bodyPr>
+          <a:lstStyle/>
+          <a:p>
+            <a:pPr algn="l">
+              <a:spcAft>
+                <a:spcPts val="400"/>
+              </a:spcAft>
+            </a:pPr>
+            <a:r>
+              <a:rPr sz="1000" b="1" i="0">
+                <a:solidFill>
+                  <a:srgbClr val="7823DC"/>
+                </a:solidFill>
+                <a:latin typeface="Yu Gothic"/>
+                <a:ea typeface="Yu Gothic"/>
+                <a:cs typeface="Yu Gothic"/>
+              </a:rPr>
+              <a:t>専任・週の使い方</a:t>
+            </a:r>
+          </a:p>
+        </p:txBody>
+      </p:sp>
+      <p:sp>
+        <p:nvSpPr>
+          <p:cNvPr id="3" name="TextBox 2"/>
+          <p:cNvSpPr txBox="1"/>
+          <p:nvPr/>
+        </p:nvSpPr>
+        <p:spPr>
+          <a:xfrm>
+            <a:off x="502920" y="512064"/>
+            <a:ext cx="11155680" cy="868680"/>
+          </a:xfrm>
+          <a:prstGeom prst="rect">
+            <a:avLst/>
+          </a:prstGeom>
+          <a:noFill/>
+        </p:spPr>
+        <p:txBody>
+          <a:bodyPr wrap="square" lIns="0" rIns="0" tIns="0" bIns="0">
+            <a:spAutoFit/>
+          </a:bodyPr>
+          <a:lstStyle/>
+          <a:p>
+            <a:pPr algn="l">
+              <a:spcAft>
+                <a:spcPts val="0"/>
+              </a:spcAft>
+            </a:pPr>
+            <a:r>
+              <a:rPr sz="1900" b="1" i="0">
+                <a:solidFill>
+                  <a:srgbClr val="262630"/>
+                </a:solidFill>
+                <a:latin typeface="Yu Gothic"/>
+                <a:ea typeface="Yu Gothic"/>
+                <a:cs typeface="Yu Gothic"/>
+              </a:rPr>
+              <a:t>想定工数（週の使い方の目安）</a:t>
+            </a:r>
+          </a:p>
+        </p:txBody>
+      </p:sp>
+      <p:sp>
+        <p:nvSpPr>
+          <p:cNvPr id="4" name="Rectangle 3"/>
+          <p:cNvSpPr/>
+          <p:nvPr/>
+        </p:nvSpPr>
+        <p:spPr>
+          <a:xfrm>
+            <a:off x="502920" y="1389888"/>
+            <a:ext cx="1463040" cy="33020"/>
+          </a:xfrm>
+          <a:prstGeom prst="rect">
+            <a:avLst/>
+          </a:prstGeom>
+          <a:solidFill>
+            <a:srgbClr val="7823DC"/>
+          </a:solidFill>
+          <a:ln>
+            <a:noFill/>
+          </a:ln>
+          <a:effectLst/>
+        </p:spPr>
+        <p:style>
+          <a:lnRef idx="1">
+            <a:schemeClr val="accent1"/>
+          </a:lnRef>
+          <a:fillRef idx="3">
+            <a:schemeClr val="accent1"/>
+          </a:fillRef>
+          <a:effectRef idx="2">
+            <a:schemeClr val="accent1"/>
+          </a:effectRef>
+          <a:fontRef idx="minor">
+            <a:schemeClr val="lt1"/>
+          </a:fontRef>
+        </p:style>
+        <p:txBody>
+          <a:bodyPr rtlCol="0" anchor="ctr"/>
+          <a:lstStyle/>
+          <a:p>
+            <a:pPr algn="ctr"/>
+          </a:p>
+        </p:txBody>
+      </p:sp>
+      <p:graphicFrame>
+        <p:nvGraphicFramePr>
+          <p:cNvPr id="5" name="Table 4"/>
+          <p:cNvGraphicFramePr>
+            <a:graphicFrameLocks noGrp="1"/>
+          </p:cNvGraphicFramePr>
+          <p:nvPr/>
+        </p:nvGraphicFramePr>
+        <p:xfrm>
+          <a:off x="502920" y="1920240"/>
+          <a:ext cx="5486398" cy="3511296"/>
+        </p:xfrm>
+        <a:graphic>
+          <a:graphicData uri="http://schemas.openxmlformats.org/drawingml/2006/table">
+            <a:tbl>
+              <a:tblPr firstRow="1" bandRow="1">
+                <a:tableStyleId>{5C22544A-7EE6-4342-B048-85BDC9FD1C3A}</a:tableStyleId>
+              </a:tblPr>
+              <a:tblGrid>
+                <a:gridCol w="3008670"/>
+                <a:gridCol w="1061883"/>
+                <a:gridCol w="1415845"/>
+              </a:tblGrid>
+              <a:tr h="585216">
+                <a:tc>
+                  <a:txBody>
+                    <a:bodyPr wrap="square"/>
+                    <a:lstStyle/>
+                    <a:p>
+                      <a:pPr algn="l">
+                        <a:spcAft>
+                          <a:spcPts val="0"/>
+                        </a:spcAft>
+                      </a:pPr>
+                      <a:r>
+                        <a:rPr sz="1050" b="1" i="0">
+                          <a:solidFill>
+                            <a:srgbClr val="FFFFFF"/>
+                          </a:solidFill>
+                          <a:latin typeface="Yu Gothic"/>
+                          <a:ea typeface="Yu Gothic"/>
+                          <a:cs typeface="Yu Gothic"/>
+                        </a:rPr>
+                        <a:t>業務</a:t>
+                      </a:r>
+                    </a:p>
+                  </a:txBody>
+                  <a:tcPr marL="54864" marR="54864" marT="18288" marB="18288" anchor="ctr">
+                    <a:solidFill>
+                      <a:srgbClr val="3A106E"/>
+                    </a:solidFill>
+                  </a:tcPr>
+                </a:tc>
+                <a:tc>
+                  <a:txBody>
+                    <a:bodyPr wrap="square"/>
+                    <a:lstStyle/>
+                    <a:p>
+                      <a:pPr algn="l">
+                        <a:spcAft>
+                          <a:spcPts val="0"/>
+                        </a:spcAft>
+                      </a:pPr>
+                      <a:r>
+                        <a:rPr sz="1050" b="1" i="0">
+                          <a:solidFill>
+                            <a:srgbClr val="FFFFFF"/>
+                          </a:solidFill>
+                          <a:latin typeface="Yu Gothic"/>
+                          <a:ea typeface="Yu Gothic"/>
+                          <a:cs typeface="Yu Gothic"/>
+                        </a:rPr>
+                        <a:t>配分</a:t>
+                      </a:r>
+                    </a:p>
+                  </a:txBody>
+                  <a:tcPr marL="54864" marR="54864" marT="18288" marB="18288" anchor="ctr">
+                    <a:solidFill>
+                      <a:srgbClr val="3A106E"/>
+                    </a:solidFill>
+                  </a:tcPr>
+                </a:tc>
+                <a:tc>
+                  <a:txBody>
+                    <a:bodyPr wrap="square"/>
+                    <a:lstStyle/>
+                    <a:p>
+                      <a:pPr algn="l">
+                        <a:spcAft>
+                          <a:spcPts val="0"/>
+                        </a:spcAft>
+                      </a:pPr>
+                      <a:r>
+                        <a:rPr sz="1050" b="1" i="0">
+                          <a:solidFill>
+                            <a:srgbClr val="FFFFFF"/>
+                          </a:solidFill>
+                          <a:latin typeface="Yu Gothic"/>
+                          <a:ea typeface="Yu Gothic"/>
+                          <a:cs typeface="Yu Gothic"/>
+                        </a:rPr>
+                        <a:t>週40hなら</a:t>
+                      </a:r>
+                    </a:p>
+                  </a:txBody>
+                  <a:tcPr marL="54864" marR="54864" marT="18288" marB="18288" anchor="ctr">
+                    <a:solidFill>
+                      <a:srgbClr val="3A106E"/>
+                    </a:solidFill>
+                  </a:tcPr>
+                </a:tc>
+              </a:tr>
+              <a:tr h="585216">
+                <a:tc>
+                  <a:txBody>
+                    <a:bodyPr wrap="square"/>
+                    <a:lstStyle/>
+                    <a:p>
+                      <a:pPr algn="l">
+                        <a:spcAft>
+                          <a:spcPts val="100"/>
+                        </a:spcAft>
+                      </a:pPr>
+                      <a:r>
+                        <a:rPr sz="1050" b="1" i="0">
+                          <a:solidFill>
+                            <a:srgbClr val="3A106E"/>
+                          </a:solidFill>
+                          <a:latin typeface="Yu Gothic"/>
+                          <a:ea typeface="Yu Gothic"/>
+                          <a:cs typeface="Yu Gothic"/>
+                        </a:rPr>
+                        <a:t>課題分析・改革設計</a:t>
+                      </a:r>
+                    </a:p>
+                  </a:txBody>
+                  <a:tcPr marL="54864" marR="54864" marT="18288" marB="18288" anchor="ctr">
+                    <a:solidFill>
+                      <a:srgbClr val="FFFFFF"/>
+                    </a:solidFill>
+                  </a:tcPr>
+                </a:tc>
+                <a:tc>
+                  <a:txBody>
+                    <a:bodyPr wrap="square"/>
+                    <a:lstStyle/>
+                    <a:p>
+                      <a:pPr algn="l">
+                        <a:spcAft>
+                          <a:spcPts val="100"/>
+                        </a:spcAft>
+                      </a:pPr>
+                      <a:r>
+                        <a:rPr sz="1050" b="0" i="0">
+                          <a:solidFill>
+                            <a:srgbClr val="262630"/>
+                          </a:solidFill>
+                          <a:latin typeface="Yu Gothic"/>
+                          <a:ea typeface="Yu Gothic"/>
+                          <a:cs typeface="Yu Gothic"/>
+                        </a:rPr>
+                        <a:t>40%</a:t>
+                      </a:r>
+                    </a:p>
+                  </a:txBody>
+                  <a:tcPr marL="54864" marR="54864" marT="18288" marB="18288" anchor="ctr">
+                    <a:solidFill>
+                      <a:srgbClr val="FFFFFF"/>
+                    </a:solidFill>
+                  </a:tcPr>
+                </a:tc>
+                <a:tc>
+                  <a:txBody>
+                    <a:bodyPr wrap="square"/>
+                    <a:lstStyle/>
+                    <a:p>
+                      <a:pPr algn="l">
+                        <a:spcAft>
+                          <a:spcPts val="100"/>
+                        </a:spcAft>
+                      </a:pPr>
+                      <a:r>
+                        <a:rPr sz="1050" b="0" i="0">
+                          <a:solidFill>
+                            <a:srgbClr val="262630"/>
+                          </a:solidFill>
+                          <a:latin typeface="Yu Gothic"/>
+                          <a:ea typeface="Yu Gothic"/>
+                          <a:cs typeface="Yu Gothic"/>
+                        </a:rPr>
+                        <a:t>16h</a:t>
+                      </a:r>
+                    </a:p>
+                  </a:txBody>
+                  <a:tcPr marL="54864" marR="54864" marT="18288" marB="18288" anchor="ctr">
+                    <a:solidFill>
+                      <a:srgbClr val="FFFFFF"/>
+                    </a:solidFill>
+                  </a:tcPr>
+                </a:tc>
+              </a:tr>
+              <a:tr h="585216">
+                <a:tc>
+                  <a:txBody>
+                    <a:bodyPr wrap="square"/>
+                    <a:lstStyle/>
+                    <a:p>
+                      <a:pPr algn="l">
+                        <a:spcAft>
+                          <a:spcPts val="100"/>
+                        </a:spcAft>
+                      </a:pPr>
+                      <a:r>
+                        <a:rPr sz="1050" b="1" i="0">
+                          <a:solidFill>
+                            <a:srgbClr val="3A106E"/>
+                          </a:solidFill>
+                          <a:latin typeface="Yu Gothic"/>
+                          <a:ea typeface="Yu Gothic"/>
+                          <a:cs typeface="Yu Gothic"/>
+                        </a:rPr>
+                        <a:t>パイロット・部門実装支援</a:t>
+                      </a:r>
+                    </a:p>
+                  </a:txBody>
+                  <a:tcPr marL="54864" marR="54864" marT="18288" marB="18288" anchor="ctr">
+                    <a:solidFill>
+                      <a:srgbClr val="F7F7F9"/>
+                    </a:solidFill>
+                  </a:tcPr>
+                </a:tc>
+                <a:tc>
+                  <a:txBody>
+                    <a:bodyPr wrap="square"/>
+                    <a:lstStyle/>
+                    <a:p>
+                      <a:pPr algn="l">
+                        <a:spcAft>
+                          <a:spcPts val="100"/>
+                        </a:spcAft>
+                      </a:pPr>
+                      <a:r>
+                        <a:rPr sz="1050" b="0" i="0">
+                          <a:solidFill>
+                            <a:srgbClr val="262630"/>
+                          </a:solidFill>
+                          <a:latin typeface="Yu Gothic"/>
+                          <a:ea typeface="Yu Gothic"/>
+                          <a:cs typeface="Yu Gothic"/>
+                        </a:rPr>
+                        <a:t>25%</a:t>
+                      </a:r>
+                    </a:p>
+                  </a:txBody>
+                  <a:tcPr marL="54864" marR="54864" marT="18288" marB="18288" anchor="ctr">
+                    <a:solidFill>
+                      <a:srgbClr val="F7F7F9"/>
+                    </a:solidFill>
+                  </a:tcPr>
+                </a:tc>
+                <a:tc>
+                  <a:txBody>
+                    <a:bodyPr wrap="square"/>
+                    <a:lstStyle/>
+                    <a:p>
+                      <a:pPr algn="l">
+                        <a:spcAft>
+                          <a:spcPts val="100"/>
+                        </a:spcAft>
+                      </a:pPr>
+                      <a:r>
+                        <a:rPr sz="1050" b="0" i="0">
+                          <a:solidFill>
+                            <a:srgbClr val="262630"/>
+                          </a:solidFill>
+                          <a:latin typeface="Yu Gothic"/>
+                          <a:ea typeface="Yu Gothic"/>
+                          <a:cs typeface="Yu Gothic"/>
+                        </a:rPr>
+                        <a:t>10h</a:t>
+                      </a:r>
+                    </a:p>
+                  </a:txBody>
+                  <a:tcPr marL="54864" marR="54864" marT="18288" marB="18288" anchor="ctr">
+                    <a:solidFill>
+                      <a:srgbClr val="F7F7F9"/>
+                    </a:solidFill>
+                  </a:tcPr>
+                </a:tc>
+              </a:tr>
+              <a:tr h="585216">
+                <a:tc>
+                  <a:txBody>
+                    <a:bodyPr wrap="square"/>
+                    <a:lstStyle/>
+                    <a:p>
+                      <a:pPr algn="l">
+                        <a:spcAft>
+                          <a:spcPts val="100"/>
+                        </a:spcAft>
+                      </a:pPr>
+                      <a:r>
+                        <a:rPr sz="1050" b="1" i="0">
+                          <a:solidFill>
+                            <a:srgbClr val="3A106E"/>
+                          </a:solidFill>
+                          <a:latin typeface="Yu Gothic"/>
+                          <a:ea typeface="Yu Gothic"/>
+                          <a:cs typeface="Yu Gothic"/>
+                        </a:rPr>
+                        <a:t>経営判断資料</a:t>
+                      </a:r>
+                    </a:p>
+                  </a:txBody>
+                  <a:tcPr marL="54864" marR="54864" marT="18288" marB="18288" anchor="ctr">
+                    <a:solidFill>
+                      <a:srgbClr val="FFFFFF"/>
+                    </a:solidFill>
+                  </a:tcPr>
+                </a:tc>
+                <a:tc>
+                  <a:txBody>
+                    <a:bodyPr wrap="square"/>
+                    <a:lstStyle/>
+                    <a:p>
+                      <a:pPr algn="l">
+                        <a:spcAft>
+                          <a:spcPts val="100"/>
+                        </a:spcAft>
+                      </a:pPr>
+                      <a:r>
+                        <a:rPr sz="1050" b="0" i="0">
+                          <a:solidFill>
+                            <a:srgbClr val="262630"/>
+                          </a:solidFill>
+                          <a:latin typeface="Yu Gothic"/>
+                          <a:ea typeface="Yu Gothic"/>
+                          <a:cs typeface="Yu Gothic"/>
+                        </a:rPr>
+                        <a:t>15%</a:t>
+                      </a:r>
+                    </a:p>
+                  </a:txBody>
+                  <a:tcPr marL="54864" marR="54864" marT="18288" marB="18288" anchor="ctr">
+                    <a:solidFill>
+                      <a:srgbClr val="FFFFFF"/>
+                    </a:solidFill>
+                  </a:tcPr>
+                </a:tc>
+                <a:tc>
+                  <a:txBody>
+                    <a:bodyPr wrap="square"/>
+                    <a:lstStyle/>
+                    <a:p>
+                      <a:pPr algn="l">
+                        <a:spcAft>
+                          <a:spcPts val="100"/>
+                        </a:spcAft>
+                      </a:pPr>
+                      <a:r>
+                        <a:rPr sz="1050" b="0" i="0">
+                          <a:solidFill>
+                            <a:srgbClr val="262630"/>
+                          </a:solidFill>
+                          <a:latin typeface="Yu Gothic"/>
+                          <a:ea typeface="Yu Gothic"/>
+                          <a:cs typeface="Yu Gothic"/>
+                        </a:rPr>
+                        <a:t>6h</a:t>
+                      </a:r>
+                    </a:p>
+                  </a:txBody>
+                  <a:tcPr marL="54864" marR="54864" marT="18288" marB="18288" anchor="ctr">
+                    <a:solidFill>
+                      <a:srgbClr val="FFFFFF"/>
+                    </a:solidFill>
+                  </a:tcPr>
+                </a:tc>
+              </a:tr>
+              <a:tr h="585216">
+                <a:tc>
+                  <a:txBody>
+                    <a:bodyPr wrap="square"/>
+                    <a:lstStyle/>
+                    <a:p>
+                      <a:pPr algn="l">
+                        <a:spcAft>
+                          <a:spcPts val="100"/>
+                        </a:spcAft>
+                      </a:pPr>
+                      <a:r>
+                        <a:rPr sz="1050" b="1" i="0">
+                          <a:solidFill>
+                            <a:srgbClr val="3A106E"/>
+                          </a:solidFill>
+                          <a:latin typeface="Yu Gothic"/>
+                          <a:ea typeface="Yu Gothic"/>
+                          <a:cs typeface="Yu Gothic"/>
+                        </a:rPr>
+                        <a:t>会議</a:t>
+                      </a:r>
+                    </a:p>
+                  </a:txBody>
+                  <a:tcPr marL="54864" marR="54864" marT="18288" marB="18288" anchor="ctr">
+                    <a:solidFill>
+                      <a:srgbClr val="F7F7F9"/>
+                    </a:solidFill>
+                  </a:tcPr>
+                </a:tc>
+                <a:tc>
+                  <a:txBody>
+                    <a:bodyPr wrap="square"/>
+                    <a:lstStyle/>
+                    <a:p>
+                      <a:pPr algn="l">
+                        <a:spcAft>
+                          <a:spcPts val="100"/>
+                        </a:spcAft>
+                      </a:pPr>
+                      <a:r>
+                        <a:rPr sz="1050" b="0" i="0">
+                          <a:solidFill>
+                            <a:srgbClr val="262630"/>
+                          </a:solidFill>
+                          <a:latin typeface="Yu Gothic"/>
+                          <a:ea typeface="Yu Gothic"/>
+                          <a:cs typeface="Yu Gothic"/>
+                        </a:rPr>
+                        <a:t>15%</a:t>
+                      </a:r>
+                    </a:p>
+                  </a:txBody>
+                  <a:tcPr marL="54864" marR="54864" marT="18288" marB="18288" anchor="ctr">
+                    <a:solidFill>
+                      <a:srgbClr val="F7F7F9"/>
+                    </a:solidFill>
+                  </a:tcPr>
+                </a:tc>
+                <a:tc>
+                  <a:txBody>
+                    <a:bodyPr wrap="square"/>
+                    <a:lstStyle/>
+                    <a:p>
+                      <a:pPr algn="l">
+                        <a:spcAft>
+                          <a:spcPts val="100"/>
+                        </a:spcAft>
+                      </a:pPr>
+                      <a:r>
+                        <a:rPr sz="1050" b="0" i="0">
+                          <a:solidFill>
+                            <a:srgbClr val="262630"/>
+                          </a:solidFill>
+                          <a:latin typeface="Yu Gothic"/>
+                          <a:ea typeface="Yu Gothic"/>
+                          <a:cs typeface="Yu Gothic"/>
+                        </a:rPr>
+                        <a:t>6h</a:t>
+                      </a:r>
+                    </a:p>
+                  </a:txBody>
+                  <a:tcPr marL="54864" marR="54864" marT="18288" marB="18288" anchor="ctr">
+                    <a:solidFill>
+                      <a:srgbClr val="F7F7F9"/>
+                    </a:solidFill>
+                  </a:tcPr>
+                </a:tc>
+              </a:tr>
+              <a:tr h="585216">
+                <a:tc>
+                  <a:txBody>
+                    <a:bodyPr wrap="square"/>
+                    <a:lstStyle/>
+                    <a:p>
+                      <a:pPr algn="l">
+                        <a:spcAft>
+                          <a:spcPts val="100"/>
+                        </a:spcAft>
+                      </a:pPr>
+                      <a:r>
+                        <a:rPr sz="1050" b="1" i="0">
+                          <a:solidFill>
+                            <a:srgbClr val="3A106E"/>
+                          </a:solidFill>
+                          <a:latin typeface="Yu Gothic"/>
+                          <a:ea typeface="Yu Gothic"/>
+                          <a:cs typeface="Yu Gothic"/>
+                        </a:rPr>
+                        <a:t>緊急対応・思考の余白</a:t>
+                      </a:r>
+                    </a:p>
+                  </a:txBody>
+                  <a:tcPr marL="54864" marR="54864" marT="18288" marB="18288" anchor="ctr">
+                    <a:solidFill>
+                      <a:srgbClr val="FFFFFF"/>
+                    </a:solidFill>
+                  </a:tcPr>
+                </a:tc>
+                <a:tc>
+                  <a:txBody>
+                    <a:bodyPr wrap="square"/>
+                    <a:lstStyle/>
+                    <a:p>
+                      <a:pPr algn="l">
+                        <a:spcAft>
+                          <a:spcPts val="100"/>
+                        </a:spcAft>
+                      </a:pPr>
+                      <a:r>
+                        <a:rPr sz="1050" b="0" i="0">
+                          <a:solidFill>
+                            <a:srgbClr val="262630"/>
+                          </a:solidFill>
+                          <a:latin typeface="Yu Gothic"/>
+                          <a:ea typeface="Yu Gothic"/>
+                          <a:cs typeface="Yu Gothic"/>
+                        </a:rPr>
+                        <a:t>5%</a:t>
+                      </a:r>
+                    </a:p>
+                  </a:txBody>
+                  <a:tcPr marL="54864" marR="54864" marT="18288" marB="18288" anchor="ctr">
+                    <a:solidFill>
+                      <a:srgbClr val="FFFFFF"/>
+                    </a:solidFill>
+                  </a:tcPr>
+                </a:tc>
+                <a:tc>
+                  <a:txBody>
+                    <a:bodyPr wrap="square"/>
+                    <a:lstStyle/>
+                    <a:p>
+                      <a:pPr algn="l">
+                        <a:spcAft>
+                          <a:spcPts val="100"/>
+                        </a:spcAft>
+                      </a:pPr>
+                      <a:r>
+                        <a:rPr sz="1050" b="0" i="0">
+                          <a:solidFill>
+                            <a:srgbClr val="262630"/>
+                          </a:solidFill>
+                          <a:latin typeface="Yu Gothic"/>
+                          <a:ea typeface="Yu Gothic"/>
+                          <a:cs typeface="Yu Gothic"/>
+                        </a:rPr>
+                        <a:t>2h</a:t>
+                      </a:r>
+                    </a:p>
+                  </a:txBody>
+                  <a:tcPr marL="54864" marR="54864" marT="18288" marB="18288" anchor="ctr">
+                    <a:solidFill>
+                      <a:srgbClr val="FFFFFF"/>
+                    </a:solidFill>
+                  </a:tcPr>
+                </a:tc>
+              </a:tr>
+            </a:tbl>
+          </a:graphicData>
+        </a:graphic>
+      </p:graphicFrame>
+      <p:sp>
+        <p:nvSpPr>
+          <p:cNvPr id="6" name="Rectangle 5"/>
+          <p:cNvSpPr/>
+          <p:nvPr/>
+        </p:nvSpPr>
+        <p:spPr>
+          <a:xfrm>
+            <a:off x="6199632" y="1920240"/>
+            <a:ext cx="5486400" cy="3511296"/>
+          </a:xfrm>
+          <a:prstGeom prst="rect">
+            <a:avLst/>
+          </a:prstGeom>
+          <a:solidFill>
+            <a:srgbClr val="FFFFFF"/>
+          </a:solidFill>
+          <a:ln w="9525">
+            <a:solidFill>
+              <a:srgbClr val="D9D9E0"/>
+            </a:solidFill>
+          </a:ln>
+          <a:effectLst/>
+        </p:spPr>
+        <p:style>
+          <a:lnRef idx="1">
+            <a:schemeClr val="accent1"/>
+          </a:lnRef>
+          <a:fillRef idx="3">
+            <a:schemeClr val="accent1"/>
+          </a:fillRef>
+          <a:effectRef idx="2">
+            <a:schemeClr val="accent1"/>
+          </a:effectRef>
+          <a:fontRef idx="minor">
+            <a:schemeClr val="lt1"/>
+          </a:fontRef>
+        </p:style>
+        <p:txBody>
+          <a:bodyPr rtlCol="0" anchor="ctr"/>
+          <a:lstStyle/>
+          <a:p>
+            <a:pPr algn="ctr"/>
+          </a:p>
+        </p:txBody>
+      </p:sp>
+      <p:sp>
+        <p:nvSpPr>
+          <p:cNvPr id="7" name="Rectangle 6"/>
+          <p:cNvSpPr/>
+          <p:nvPr/>
+        </p:nvSpPr>
+        <p:spPr>
+          <a:xfrm>
+            <a:off x="6199632" y="1920240"/>
+            <a:ext cx="5486400" cy="457200"/>
+          </a:xfrm>
+          <a:prstGeom prst="rect">
+            <a:avLst/>
+          </a:prstGeom>
+          <a:solidFill>
+            <a:srgbClr val="7823DC"/>
+          </a:solidFill>
+          <a:ln>
+            <a:noFill/>
+          </a:ln>
+          <a:effectLst/>
+        </p:spPr>
+        <p:style>
+          <a:lnRef idx="1">
+            <a:schemeClr val="accent1"/>
+          </a:lnRef>
+          <a:fillRef idx="3">
+            <a:schemeClr val="accent1"/>
+          </a:fillRef>
+          <a:effectRef idx="2">
+            <a:schemeClr val="accent1"/>
+          </a:effectRef>
+          <a:fontRef idx="minor">
+            <a:schemeClr val="lt1"/>
+          </a:fontRef>
+        </p:style>
+        <p:txBody>
+          <a:bodyPr rtlCol="0" anchor="ctr"/>
+          <a:lstStyle/>
+          <a:p>
+            <a:pPr algn="ctr"/>
+          </a:p>
+        </p:txBody>
+      </p:sp>
+      <p:sp>
+        <p:nvSpPr>
+          <p:cNvPr id="8" name="TextBox 7"/>
+          <p:cNvSpPr txBox="1"/>
+          <p:nvPr/>
+        </p:nvSpPr>
+        <p:spPr>
+          <a:xfrm>
+            <a:off x="6199632" y="1920240"/>
+            <a:ext cx="5486400" cy="457200"/>
+          </a:xfrm>
+          <a:prstGeom prst="rect">
+            <a:avLst/>
+          </a:prstGeom>
+          <a:noFill/>
+        </p:spPr>
+        <p:txBody>
+          <a:bodyPr wrap="square" lIns="0" rIns="0" tIns="0" bIns="0" anchor="ctr">
+            <a:spAutoFit/>
+          </a:bodyPr>
+          <a:lstStyle/>
+          <a:p>
+            <a:pPr algn="ctr">
+              <a:spcAft>
+                <a:spcPts val="0"/>
+              </a:spcAft>
+            </a:pPr>
+            <a:r>
+              <a:rPr sz="1200" b="1" i="0">
+                <a:solidFill>
+                  <a:srgbClr val="FFFFFF"/>
+                </a:solidFill>
+                <a:latin typeface="Yu Gothic"/>
+                <a:ea typeface="Yu Gothic"/>
+                <a:cs typeface="Yu Gothic"/>
+              </a:rPr>
+              <a:t>工数の防衛ルール</a:t>
+            </a:r>
+          </a:p>
+        </p:txBody>
+      </p:sp>
+      <p:sp>
+        <p:nvSpPr>
+          <p:cNvPr id="9" name="Oval 8"/>
+          <p:cNvSpPr/>
+          <p:nvPr/>
+        </p:nvSpPr>
+        <p:spPr>
+          <a:xfrm>
+            <a:off x="6400800" y="2578608"/>
+            <a:ext cx="384048" cy="384048"/>
+          </a:xfrm>
+          <a:prstGeom prst="ellipse">
+            <a:avLst/>
+          </a:prstGeom>
+          <a:solidFill>
+            <a:srgbClr val="7823DC"/>
+          </a:solidFill>
+          <a:ln>
+            <a:noFill/>
+          </a:ln>
+          <a:effectLst/>
+        </p:spPr>
+        <p:style>
+          <a:lnRef idx="1">
+            <a:schemeClr val="accent1"/>
+          </a:lnRef>
+          <a:fillRef idx="3">
+            <a:schemeClr val="accent1"/>
+          </a:fillRef>
+          <a:effectRef idx="2">
+            <a:schemeClr val="accent1"/>
+          </a:effectRef>
+          <a:fontRef idx="minor">
+            <a:schemeClr val="lt1"/>
+          </a:fontRef>
+        </p:style>
+        <p:txBody>
+          <a:bodyPr rtlCol="0" anchor="ctr" wrap="none" lIns="0" rIns="0" tIns="0" bIns="0"/>
+          <a:lstStyle/>
+          <a:p>
+            <a:pPr algn="ctr">
+              <a:spcAft>
+                <a:spcPts val="0"/>
+              </a:spcAft>
+            </a:pPr>
+            <a:r>
+              <a:rPr sz="1500" b="1" i="0">
+                <a:solidFill>
+                  <a:srgbClr val="FFFFFF"/>
+                </a:solidFill>
+                <a:latin typeface="Yu Gothic"/>
+                <a:ea typeface="Yu Gothic"/>
+                <a:cs typeface="Yu Gothic"/>
+              </a:rPr>
+              <a:t>1</a:t>
+            </a:r>
+          </a:p>
+        </p:txBody>
+      </p:sp>
+      <p:sp>
+        <p:nvSpPr>
+          <p:cNvPr id="10" name="TextBox 9"/>
+          <p:cNvSpPr txBox="1"/>
+          <p:nvPr/>
+        </p:nvSpPr>
+        <p:spPr>
+          <a:xfrm>
+            <a:off x="6931152" y="2523744"/>
+            <a:ext cx="4553712" cy="722376"/>
+          </a:xfrm>
+          <a:prstGeom prst="rect">
+            <a:avLst/>
+          </a:prstGeom>
+          <a:noFill/>
+        </p:spPr>
+        <p:txBody>
+          <a:bodyPr wrap="square" lIns="0" rIns="0" tIns="0" bIns="0" anchor="ctr">
+            <a:spAutoFit/>
+          </a:bodyPr>
+          <a:lstStyle/>
+          <a:p>
+            <a:pPr algn="l">
+              <a:spcAft>
+                <a:spcPts val="200"/>
+              </a:spcAft>
+            </a:pPr>
+            <a:r>
+              <a:rPr sz="1100" b="1" i="0">
+                <a:solidFill>
+                  <a:srgbClr val="3A106E"/>
+                </a:solidFill>
+                <a:latin typeface="Yu Gothic"/>
+                <a:ea typeface="Yu Gothic"/>
+                <a:cs typeface="Yu Gothic"/>
+              </a:rPr>
+              <a:t>会議は週8時間以内</a:t>
+            </a:r>
+          </a:p>
+          <a:p>
+            <a:pPr algn="l">
+              <a:spcAft>
+                <a:spcPts val="0"/>
+              </a:spcAft>
+            </a:pPr>
+            <a:r>
+              <a:rPr sz="950" b="0" i="0">
+                <a:solidFill>
+                  <a:srgbClr val="262630"/>
+                </a:solidFill>
+                <a:latin typeface="Yu Gothic"/>
+                <a:ea typeface="Yu Gothic"/>
+                <a:cs typeface="Yu Gothic"/>
+              </a:rPr>
+              <a:t>坪井さんとの同席は週4h以内・分科会はどちらか1名</a:t>
+            </a:r>
+          </a:p>
+        </p:txBody>
+      </p:sp>
+      <p:sp>
+        <p:nvSpPr>
+          <p:cNvPr id="11" name="Oval 10"/>
+          <p:cNvSpPr/>
+          <p:nvPr/>
+        </p:nvSpPr>
+        <p:spPr>
+          <a:xfrm>
+            <a:off x="6400800" y="3300984"/>
+            <a:ext cx="384048" cy="384048"/>
+          </a:xfrm>
+          <a:prstGeom prst="ellipse">
+            <a:avLst/>
+          </a:prstGeom>
+          <a:solidFill>
+            <a:srgbClr val="7823DC"/>
+          </a:solidFill>
+          <a:ln>
+            <a:noFill/>
+          </a:ln>
+          <a:effectLst/>
+        </p:spPr>
+        <p:style>
+          <a:lnRef idx="1">
+            <a:schemeClr val="accent1"/>
+          </a:lnRef>
+          <a:fillRef idx="3">
+            <a:schemeClr val="accent1"/>
+          </a:fillRef>
+          <a:effectRef idx="2">
+            <a:schemeClr val="accent1"/>
+          </a:effectRef>
+          <a:fontRef idx="minor">
+            <a:schemeClr val="lt1"/>
+          </a:fontRef>
+        </p:style>
+        <p:txBody>
+          <a:bodyPr rtlCol="0" anchor="ctr" wrap="none" lIns="0" rIns="0" tIns="0" bIns="0"/>
+          <a:lstStyle/>
+          <a:p>
+            <a:pPr algn="ctr">
+              <a:spcAft>
+                <a:spcPts val="0"/>
+              </a:spcAft>
+            </a:pPr>
+            <a:r>
+              <a:rPr sz="1500" b="1" i="0">
+                <a:solidFill>
+                  <a:srgbClr val="FFFFFF"/>
+                </a:solidFill>
+                <a:latin typeface="Yu Gothic"/>
+                <a:ea typeface="Yu Gothic"/>
+                <a:cs typeface="Yu Gothic"/>
+              </a:rPr>
+              <a:t>2</a:t>
+            </a:r>
+          </a:p>
+        </p:txBody>
+      </p:sp>
+      <p:sp>
+        <p:nvSpPr>
+          <p:cNvPr id="12" name="TextBox 11"/>
+          <p:cNvSpPr txBox="1"/>
+          <p:nvPr/>
+        </p:nvSpPr>
+        <p:spPr>
+          <a:xfrm>
+            <a:off x="6931152" y="3246120"/>
+            <a:ext cx="4553712" cy="722376"/>
+          </a:xfrm>
+          <a:prstGeom prst="rect">
+            <a:avLst/>
+          </a:prstGeom>
+          <a:noFill/>
+        </p:spPr>
+        <p:txBody>
+          <a:bodyPr wrap="square" lIns="0" rIns="0" tIns="0" bIns="0" anchor="ctr">
+            <a:spAutoFit/>
+          </a:bodyPr>
+          <a:lstStyle/>
+          <a:p>
+            <a:pPr algn="l">
+              <a:spcAft>
+                <a:spcPts val="200"/>
+              </a:spcAft>
+            </a:pPr>
+            <a:r>
+              <a:rPr sz="1100" b="1" i="0">
+                <a:solidFill>
+                  <a:srgbClr val="3A106E"/>
+                </a:solidFill>
+                <a:latin typeface="Yu Gothic"/>
+                <a:ea typeface="Yu Gothic"/>
+                <a:cs typeface="Yu Gothic"/>
+              </a:rPr>
+              <a:t>資料は1ページまで</a:t>
+            </a:r>
+          </a:p>
+          <a:p>
+            <a:pPr algn="l">
+              <a:spcAft>
+                <a:spcPts val="0"/>
+              </a:spcAft>
+            </a:pPr>
+            <a:r>
+              <a:rPr sz="950" b="0" i="0">
+                <a:solidFill>
+                  <a:srgbClr val="262630"/>
+                </a:solidFill>
+                <a:latin typeface="Yu Gothic"/>
+                <a:ea typeface="Yu Gothic"/>
+                <a:cs typeface="Yu Gothic"/>
+              </a:rPr>
+              <a:t>装飾を始めたら赤信号</a:t>
+            </a:r>
+          </a:p>
+        </p:txBody>
+      </p:sp>
+      <p:sp>
+        <p:nvSpPr>
+          <p:cNvPr id="13" name="Oval 12"/>
+          <p:cNvSpPr/>
+          <p:nvPr/>
+        </p:nvSpPr>
+        <p:spPr>
+          <a:xfrm>
+            <a:off x="6400800" y="4023360"/>
+            <a:ext cx="384048" cy="384048"/>
+          </a:xfrm>
+          <a:prstGeom prst="ellipse">
+            <a:avLst/>
+          </a:prstGeom>
+          <a:solidFill>
+            <a:srgbClr val="7823DC"/>
+          </a:solidFill>
+          <a:ln>
+            <a:noFill/>
+          </a:ln>
+          <a:effectLst/>
+        </p:spPr>
+        <p:style>
+          <a:lnRef idx="1">
+            <a:schemeClr val="accent1"/>
+          </a:lnRef>
+          <a:fillRef idx="3">
+            <a:schemeClr val="accent1"/>
+          </a:fillRef>
+          <a:effectRef idx="2">
+            <a:schemeClr val="accent1"/>
+          </a:effectRef>
+          <a:fontRef idx="minor">
+            <a:schemeClr val="lt1"/>
+          </a:fontRef>
+        </p:style>
+        <p:txBody>
+          <a:bodyPr rtlCol="0" anchor="ctr" wrap="none" lIns="0" rIns="0" tIns="0" bIns="0"/>
+          <a:lstStyle/>
+          <a:p>
+            <a:pPr algn="ctr">
+              <a:spcAft>
+                <a:spcPts val="0"/>
+              </a:spcAft>
+            </a:pPr>
+            <a:r>
+              <a:rPr sz="1500" b="1" i="0">
+                <a:solidFill>
+                  <a:srgbClr val="FFFFFF"/>
+                </a:solidFill>
+                <a:latin typeface="Yu Gothic"/>
+                <a:ea typeface="Yu Gothic"/>
+                <a:cs typeface="Yu Gothic"/>
+              </a:rPr>
+              <a:t>3</a:t>
+            </a:r>
+          </a:p>
+        </p:txBody>
+      </p:sp>
+      <p:sp>
+        <p:nvSpPr>
+          <p:cNvPr id="14" name="TextBox 13"/>
+          <p:cNvSpPr txBox="1"/>
+          <p:nvPr/>
+        </p:nvSpPr>
+        <p:spPr>
+          <a:xfrm>
+            <a:off x="6931152" y="3968496"/>
+            <a:ext cx="4553712" cy="722376"/>
+          </a:xfrm>
+          <a:prstGeom prst="rect">
+            <a:avLst/>
+          </a:prstGeom>
+          <a:noFill/>
+        </p:spPr>
+        <p:txBody>
+          <a:bodyPr wrap="square" lIns="0" rIns="0" tIns="0" bIns="0" anchor="ctr">
+            <a:spAutoFit/>
+          </a:bodyPr>
+          <a:lstStyle/>
+          <a:p>
+            <a:pPr algn="l">
+              <a:spcAft>
+                <a:spcPts val="200"/>
+              </a:spcAft>
+            </a:pPr>
+            <a:r>
+              <a:rPr sz="1100" b="1" i="0">
+                <a:solidFill>
+                  <a:srgbClr val="3A106E"/>
+                </a:solidFill>
+                <a:latin typeface="Yu Gothic"/>
+                <a:ea typeface="Yu Gothic"/>
+                <a:cs typeface="Yu Gothic"/>
+              </a:rPr>
+              <a:t>稼働を100%埋めない</a:t>
+            </a:r>
+          </a:p>
+          <a:p>
+            <a:pPr algn="l">
+              <a:spcAft>
+                <a:spcPts val="0"/>
+              </a:spcAft>
+            </a:pPr>
+            <a:r>
+              <a:rPr sz="950" b="0" i="0">
+                <a:solidFill>
+                  <a:srgbClr val="262630"/>
+                </a:solidFill>
+                <a:latin typeface="Yu Gothic"/>
+                <a:ea typeface="Yu Gothic"/>
+                <a:cs typeface="Yu Gothic"/>
+              </a:rPr>
+              <a:t>1割は突発の重要課題用</a:t>
+            </a:r>
+          </a:p>
+        </p:txBody>
+      </p:sp>
+      <p:sp>
+        <p:nvSpPr>
+          <p:cNvPr id="15" name="Oval 14"/>
+          <p:cNvSpPr/>
+          <p:nvPr/>
+        </p:nvSpPr>
+        <p:spPr>
+          <a:xfrm>
+            <a:off x="6400800" y="4745736"/>
+            <a:ext cx="384048" cy="384048"/>
+          </a:xfrm>
+          <a:prstGeom prst="ellipse">
+            <a:avLst/>
+          </a:prstGeom>
+          <a:solidFill>
+            <a:srgbClr val="7823DC"/>
+          </a:solidFill>
+          <a:ln>
+            <a:noFill/>
+          </a:ln>
+          <a:effectLst/>
+        </p:spPr>
+        <p:style>
+          <a:lnRef idx="1">
+            <a:schemeClr val="accent1"/>
+          </a:lnRef>
+          <a:fillRef idx="3">
+            <a:schemeClr val="accent1"/>
+          </a:fillRef>
+          <a:effectRef idx="2">
+            <a:schemeClr val="accent1"/>
+          </a:effectRef>
+          <a:fontRef idx="minor">
+            <a:schemeClr val="lt1"/>
+          </a:fontRef>
+        </p:style>
+        <p:txBody>
+          <a:bodyPr rtlCol="0" anchor="ctr" wrap="none" lIns="0" rIns="0" tIns="0" bIns="0"/>
+          <a:lstStyle/>
+          <a:p>
+            <a:pPr algn="ctr">
+              <a:spcAft>
+                <a:spcPts val="0"/>
+              </a:spcAft>
+            </a:pPr>
+            <a:r>
+              <a:rPr sz="1500" b="1" i="0">
+                <a:solidFill>
+                  <a:srgbClr val="FFFFFF"/>
+                </a:solidFill>
+                <a:latin typeface="Yu Gothic"/>
+                <a:ea typeface="Yu Gothic"/>
+                <a:cs typeface="Yu Gothic"/>
+              </a:rPr>
+              <a:t>4</a:t>
+            </a:r>
+          </a:p>
+        </p:txBody>
+      </p:sp>
+      <p:sp>
+        <p:nvSpPr>
+          <p:cNvPr id="16" name="TextBox 15"/>
+          <p:cNvSpPr txBox="1"/>
+          <p:nvPr/>
+        </p:nvSpPr>
+        <p:spPr>
+          <a:xfrm>
+            <a:off x="6931152" y="4690872"/>
+            <a:ext cx="4553712" cy="722376"/>
+          </a:xfrm>
+          <a:prstGeom prst="rect">
+            <a:avLst/>
+          </a:prstGeom>
+          <a:noFill/>
+        </p:spPr>
+        <p:txBody>
+          <a:bodyPr wrap="square" lIns="0" rIns="0" tIns="0" bIns="0" anchor="ctr">
+            <a:spAutoFit/>
+          </a:bodyPr>
+          <a:lstStyle/>
+          <a:p>
+            <a:pPr algn="l">
+              <a:spcAft>
+                <a:spcPts val="200"/>
+              </a:spcAft>
+            </a:pPr>
+            <a:r>
+              <a:rPr sz="1100" b="1" i="0">
+                <a:solidFill>
+                  <a:srgbClr val="3A106E"/>
+                </a:solidFill>
+                <a:latin typeface="Yu Gothic"/>
+                <a:ea typeface="Yu Gothic"/>
+                <a:cs typeface="Yu Gothic"/>
+              </a:rPr>
+              <a:t>元業務の引継ぎ支援は4週間・週2時間以内</a:t>
+            </a:r>
+          </a:p>
+          <a:p>
+            <a:pPr algn="l">
+              <a:spcAft>
+                <a:spcPts val="0"/>
+              </a:spcAft>
+            </a:pPr>
+            <a:r>
+              <a:rPr sz="950" b="0" i="0">
+                <a:solidFill>
+                  <a:srgbClr val="262630"/>
+                </a:solidFill>
+                <a:latin typeface="Yu Gothic"/>
+                <a:ea typeface="Yu Gothic"/>
+                <a:cs typeface="Yu Gothic"/>
+              </a:rPr>
+              <a:t>着任後4週で完了させる</a:t>
+            </a:r>
+          </a:p>
+        </p:txBody>
+      </p:sp>
+      <p:sp>
+        <p:nvSpPr>
+          <p:cNvPr id="17" name="Rectangle 16"/>
+          <p:cNvSpPr/>
+          <p:nvPr/>
+        </p:nvSpPr>
+        <p:spPr>
+          <a:xfrm>
+            <a:off x="502920" y="5614416"/>
+            <a:ext cx="11183112" cy="658368"/>
+          </a:xfrm>
+          <a:prstGeom prst="rect">
+            <a:avLst/>
+          </a:prstGeom>
+          <a:solidFill>
+            <a:srgbClr val="F3EFFB"/>
+          </a:solidFill>
+          <a:ln>
+            <a:noFill/>
+          </a:ln>
+          <a:effectLst/>
+        </p:spPr>
+        <p:style>
+          <a:lnRef idx="1">
+            <a:schemeClr val="accent1"/>
+          </a:lnRef>
+          <a:fillRef idx="3">
+            <a:schemeClr val="accent1"/>
+          </a:fillRef>
+          <a:effectRef idx="2">
+            <a:schemeClr val="accent1"/>
+          </a:effectRef>
+          <a:fontRef idx="minor">
+            <a:schemeClr val="lt1"/>
+          </a:fontRef>
+        </p:style>
+        <p:txBody>
+          <a:bodyPr rtlCol="0" anchor="ctr"/>
+          <a:lstStyle/>
+          <a:p>
+            <a:pPr algn="ctr"/>
+          </a:p>
+        </p:txBody>
+      </p:sp>
+      <p:sp>
+        <p:nvSpPr>
+          <p:cNvPr id="18" name="Rectangle 17"/>
+          <p:cNvSpPr/>
+          <p:nvPr/>
+        </p:nvSpPr>
+        <p:spPr>
+          <a:xfrm>
+            <a:off x="502920" y="5614416"/>
+            <a:ext cx="38100" cy="658368"/>
+          </a:xfrm>
+          <a:prstGeom prst="rect">
+            <a:avLst/>
+          </a:prstGeom>
+          <a:solidFill>
+            <a:srgbClr val="3A106E"/>
+          </a:solidFill>
+          <a:ln>
+            <a:noFill/>
+          </a:ln>
+          <a:effectLst/>
+        </p:spPr>
+        <p:style>
+          <a:lnRef idx="1">
+            <a:schemeClr val="accent1"/>
+          </a:lnRef>
+          <a:fillRef idx="3">
+            <a:schemeClr val="accent1"/>
+          </a:fillRef>
+          <a:effectRef idx="2">
+            <a:schemeClr val="accent1"/>
+          </a:effectRef>
+          <a:fontRef idx="minor">
+            <a:schemeClr val="lt1"/>
+          </a:fontRef>
+        </p:style>
+        <p:txBody>
+          <a:bodyPr rtlCol="0" anchor="ctr"/>
+          <a:lstStyle/>
+          <a:p>
+            <a:pPr algn="ctr"/>
+          </a:p>
+        </p:txBody>
+      </p:sp>
+      <p:sp>
+        <p:nvSpPr>
+          <p:cNvPr id="19" name="TextBox 18"/>
+          <p:cNvSpPr txBox="1"/>
+          <p:nvPr/>
+        </p:nvSpPr>
+        <p:spPr>
+          <a:xfrm>
+            <a:off x="713232" y="5669280"/>
+            <a:ext cx="10835640" cy="548640"/>
+          </a:xfrm>
+          <a:prstGeom prst="rect">
+            <a:avLst/>
+          </a:prstGeom>
+          <a:noFill/>
+        </p:spPr>
+        <p:txBody>
+          <a:bodyPr wrap="square" lIns="0" rIns="0" tIns="0" bIns="0" anchor="ctr">
+            <a:spAutoFit/>
+          </a:bodyPr>
+          <a:lstStyle/>
+          <a:p>
+            <a:pPr algn="l">
+              <a:spcAft>
+                <a:spcPts val="0"/>
+              </a:spcAft>
+            </a:pPr>
+            <a:r>
+              <a:rPr sz="1050" b="1" i="0">
+                <a:solidFill>
+                  <a:srgbClr val="3A106E"/>
+                </a:solidFill>
+                <a:latin typeface="Yu Gothic"/>
+                <a:ea typeface="Yu Gothic"/>
+                <a:cs typeface="Yu Gothic"/>
+              </a:rPr>
+              <a:t>STOが自分の首を絞めないための約束です。守れなくなりそうなときは新谷に言ってください。</a:t>
+            </a:r>
+          </a:p>
+        </p:txBody>
+      </p:sp>
+      <p:sp>
+        <p:nvSpPr>
+          <p:cNvPr id="20" name="Rectangle 19"/>
+          <p:cNvSpPr/>
+          <p:nvPr/>
+        </p:nvSpPr>
+        <p:spPr>
+          <a:xfrm>
+            <a:off x="502920" y="6510528"/>
+            <a:ext cx="11183112" cy="15240"/>
+          </a:xfrm>
+          <a:prstGeom prst="rect">
+            <a:avLst/>
+          </a:prstGeom>
+          <a:solidFill>
+            <a:srgbClr val="D9D9E0"/>
+          </a:solidFill>
+          <a:ln>
+            <a:noFill/>
+          </a:ln>
+          <a:effectLst/>
+        </p:spPr>
+        <p:style>
+          <a:lnRef idx="1">
+            <a:schemeClr val="accent1"/>
+          </a:lnRef>
+          <a:fillRef idx="3">
+            <a:schemeClr val="accent1"/>
+          </a:fillRef>
+          <a:effectRef idx="2">
+            <a:schemeClr val="accent1"/>
+          </a:effectRef>
+          <a:fontRef idx="minor">
+            <a:schemeClr val="lt1"/>
+          </a:fontRef>
+        </p:style>
+        <p:txBody>
+          <a:bodyPr rtlCol="0" anchor="ctr"/>
+          <a:lstStyle/>
+          <a:p>
+            <a:pPr algn="ctr"/>
+          </a:p>
+        </p:txBody>
+      </p:sp>
+      <p:sp>
+        <p:nvSpPr>
+          <p:cNvPr id="21" name="TextBox 20"/>
+          <p:cNvSpPr txBox="1"/>
+          <p:nvPr/>
+        </p:nvSpPr>
+        <p:spPr>
+          <a:xfrm>
+            <a:off x="502920" y="6565392"/>
+            <a:ext cx="8686800" cy="274320"/>
+          </a:xfrm>
+          <a:prstGeom prst="rect">
+            <a:avLst/>
+          </a:prstGeom>
+          <a:noFill/>
+        </p:spPr>
+        <p:txBody>
+          <a:bodyPr wrap="square" lIns="0" rIns="0" tIns="0" bIns="0">
+            <a:spAutoFit/>
+          </a:bodyPr>
+          <a:lstStyle/>
+          <a:p>
+            <a:pPr algn="l">
+              <a:spcAft>
+                <a:spcPts val="400"/>
+              </a:spcAft>
+            </a:pPr>
+            <a:r>
+              <a:rPr sz="750" b="0" i="0">
+                <a:solidFill>
+                  <a:srgbClr val="8A8A99"/>
+                </a:solidFill>
+                <a:latin typeface="Yu Gothic"/>
+                <a:ea typeface="Yu Gothic"/>
+                <a:cs typeface="Yu Gothic"/>
+              </a:rPr>
+              <a:t>円谷プロダクション 営業改革 | 社外秘</a:t>
+            </a:r>
+          </a:p>
+        </p:txBody>
+      </p:sp>
+      <p:sp>
+        <p:nvSpPr>
+          <p:cNvPr id="22" name="TextBox 21"/>
+          <p:cNvSpPr txBox="1"/>
+          <p:nvPr/>
+        </p:nvSpPr>
+        <p:spPr>
+          <a:xfrm>
+            <a:off x="11247120" y="6565392"/>
+            <a:ext cx="457200" cy="274320"/>
+          </a:xfrm>
+          <a:prstGeom prst="rect">
+            <a:avLst/>
+          </a:prstGeom>
+          <a:noFill/>
+        </p:spPr>
+        <p:txBody>
+          <a:bodyPr wrap="square" lIns="0" rIns="0" tIns="0" bIns="0">
+            <a:spAutoFit/>
+          </a:bodyPr>
+          <a:lstStyle/>
+          <a:p>
+            <a:pPr algn="r">
+              <a:spcAft>
+                <a:spcPts val="400"/>
+              </a:spcAft>
+            </a:pPr>
+            <a:r>
+              <a:rPr sz="900" b="0" i="0">
+                <a:solidFill>
+                  <a:srgbClr val="5F5F6E"/>
+                </a:solidFill>
+                <a:latin typeface="Yu Gothic"/>
+                <a:ea typeface="Yu Gothic"/>
+                <a:cs typeface="Yu Gothic"/>
+              </a:rPr>
+              <a:t>7</a:t>
+            </a:r>
+          </a:p>
+        </p:txBody>
+      </p:sp>
+    </p:spTree>
+  </p:cSld>
+  <p:clrMapOvr>
+    <a:masterClrMapping/>
+  </p:clrMapOvr>
+</p:sld>
+</file>
+
+<file path=ppt/slides/slide8.xml><?xml version="1.0" encoding="utf-8"?>
 <p:sld xmlns:a="http://schemas.openxmlformats.org/drawingml/2006/main" xmlns:p="http://schemas.openxmlformats.org/presentationml/2006/main" xmlns:r="http://schemas.openxmlformats.org/officeDocument/2006/relationships">
   <p:cSld>
     <p:spTree>
@@ -10063,7 +13288,7 @@
                 <a:ea typeface="Yu Gothic"/>
                 <a:cs typeface="Yu Gothic"/>
               </a:rPr>
-              <a:t>7</a:t>
+              <a:t>8</a:t>
             </a:r>
           </a:p>
         </p:txBody>
@@ -10076,7 +13301,7 @@
 </p:sld>
 </file>
 
-<file path=ppt/slides/slide8.xml><?xml version="1.0" encoding="utf-8"?>
+<file path=ppt/slides/slide9.xml><?xml version="1.0" encoding="utf-8"?>
 <p:sld xmlns:a="http://schemas.openxmlformats.org/drawingml/2006/main" xmlns:p="http://schemas.openxmlformats.org/presentationml/2006/main" xmlns:r="http://schemas.openxmlformats.org/officeDocument/2006/relationships">
   <p:cSld>
     <p:spTree>
@@ -11538,1589 +14763,6 @@
                 <a:ea typeface="Yu Gothic"/>
                 <a:cs typeface="Yu Gothic"/>
               </a:rPr>
-              <a:t>8</a:t>
-            </a:r>
-          </a:p>
-        </p:txBody>
-      </p:sp>
-    </p:spTree>
-  </p:cSld>
-  <p:clrMapOvr>
-    <a:masterClrMapping/>
-  </p:clrMapOvr>
-</p:sld>
-</file>
-
-<file path=ppt/slides/slide9.xml><?xml version="1.0" encoding="utf-8"?>
-<p:sld xmlns:a="http://schemas.openxmlformats.org/drawingml/2006/main" xmlns:p="http://schemas.openxmlformats.org/presentationml/2006/main" xmlns:r="http://schemas.openxmlformats.org/officeDocument/2006/relationships">
-  <p:cSld>
-    <p:spTree>
-      <p:nvGrpSpPr>
-        <p:cNvPr id="1" name=""/>
-        <p:cNvGrpSpPr/>
-        <p:nvPr/>
-      </p:nvGrpSpPr>
-      <p:grpSpPr/>
-      <p:sp>
-        <p:nvSpPr>
-          <p:cNvPr id="2" name="TextBox 1"/>
-          <p:cNvSpPr txBox="1"/>
-          <p:nvPr/>
-        </p:nvSpPr>
-        <p:spPr>
-          <a:xfrm>
-            <a:off x="502920" y="256032"/>
-            <a:ext cx="11155680" cy="256032"/>
-          </a:xfrm>
-          <a:prstGeom prst="rect">
-            <a:avLst/>
-          </a:prstGeom>
-          <a:noFill/>
-        </p:spPr>
-        <p:txBody>
-          <a:bodyPr wrap="square" lIns="0" rIns="0" tIns="0" bIns="0">
-            <a:spAutoFit/>
-          </a:bodyPr>
-          <a:lstStyle/>
-          <a:p>
-            <a:pPr algn="l">
-              <a:spcAft>
-                <a:spcPts val="400"/>
-              </a:spcAft>
-            </a:pPr>
-            <a:r>
-              <a:rPr sz="1000" b="1" i="0">
-                <a:solidFill>
-                  <a:srgbClr val="7823DC"/>
-                </a:solidFill>
-                <a:latin typeface="Yu Gothic"/>
-                <a:ea typeface="Yu Gothic"/>
-                <a:cs typeface="Yu Gothic"/>
-              </a:rPr>
-              <a:t>着任準備</a:t>
-            </a:r>
-          </a:p>
-        </p:txBody>
-      </p:sp>
-      <p:sp>
-        <p:nvSpPr>
-          <p:cNvPr id="3" name="TextBox 2"/>
-          <p:cNvSpPr txBox="1"/>
-          <p:nvPr/>
-        </p:nvSpPr>
-        <p:spPr>
-          <a:xfrm>
-            <a:off x="502920" y="512064"/>
-            <a:ext cx="11155680" cy="868680"/>
-          </a:xfrm>
-          <a:prstGeom prst="rect">
-            <a:avLst/>
-          </a:prstGeom>
-          <a:noFill/>
-        </p:spPr>
-        <p:txBody>
-          <a:bodyPr wrap="square" lIns="0" rIns="0" tIns="0" bIns="0">
-            <a:spAutoFit/>
-          </a:bodyPr>
-          <a:lstStyle/>
-          <a:p>
-            <a:pPr algn="l">
-              <a:spcAft>
-                <a:spcPts val="0"/>
-              </a:spcAft>
-            </a:pPr>
-            <a:r>
-              <a:rPr sz="1900" b="1" i="0">
-                <a:solidFill>
-                  <a:srgbClr val="262630"/>
-                </a:solidFill>
-                <a:latin typeface="Yu Gothic"/>
-                <a:ea typeface="Yu Gothic"/>
-                <a:cs typeface="Yu Gothic"/>
-              </a:rPr>
-              <a:t>資料の読む順と初週の予定</a:t>
-            </a:r>
-          </a:p>
-        </p:txBody>
-      </p:sp>
-      <p:sp>
-        <p:nvSpPr>
-          <p:cNvPr id="4" name="Rectangle 3"/>
-          <p:cNvSpPr/>
-          <p:nvPr/>
-        </p:nvSpPr>
-        <p:spPr>
-          <a:xfrm>
-            <a:off x="502920" y="1389888"/>
-            <a:ext cx="1463040" cy="33020"/>
-          </a:xfrm>
-          <a:prstGeom prst="rect">
-            <a:avLst/>
-          </a:prstGeom>
-          <a:solidFill>
-            <a:srgbClr val="7823DC"/>
-          </a:solidFill>
-          <a:ln>
-            <a:noFill/>
-          </a:ln>
-          <a:effectLst/>
-        </p:spPr>
-        <p:style>
-          <a:lnRef idx="1">
-            <a:schemeClr val="accent1"/>
-          </a:lnRef>
-          <a:fillRef idx="3">
-            <a:schemeClr val="accent1"/>
-          </a:fillRef>
-          <a:effectRef idx="2">
-            <a:schemeClr val="accent1"/>
-          </a:effectRef>
-          <a:fontRef idx="minor">
-            <a:schemeClr val="lt1"/>
-          </a:fontRef>
-        </p:style>
-        <p:txBody>
-          <a:bodyPr rtlCol="0" anchor="ctr"/>
-          <a:lstStyle/>
-          <a:p>
-            <a:pPr algn="ctr"/>
-          </a:p>
-        </p:txBody>
-      </p:sp>
-      <p:sp>
-        <p:nvSpPr>
-          <p:cNvPr id="5" name="Rectangle 4"/>
-          <p:cNvSpPr/>
-          <p:nvPr/>
-        </p:nvSpPr>
-        <p:spPr>
-          <a:xfrm>
-            <a:off x="502920" y="1920240"/>
-            <a:ext cx="5486400" cy="2999232"/>
-          </a:xfrm>
-          <a:prstGeom prst="rect">
-            <a:avLst/>
-          </a:prstGeom>
-          <a:solidFill>
-            <a:srgbClr val="FFFFFF"/>
-          </a:solidFill>
-          <a:ln w="9525">
-            <a:solidFill>
-              <a:srgbClr val="D9D9E0"/>
-            </a:solidFill>
-          </a:ln>
-          <a:effectLst/>
-        </p:spPr>
-        <p:style>
-          <a:lnRef idx="1">
-            <a:schemeClr val="accent1"/>
-          </a:lnRef>
-          <a:fillRef idx="3">
-            <a:schemeClr val="accent1"/>
-          </a:fillRef>
-          <a:effectRef idx="2">
-            <a:schemeClr val="accent1"/>
-          </a:effectRef>
-          <a:fontRef idx="minor">
-            <a:schemeClr val="lt1"/>
-          </a:fontRef>
-        </p:style>
-        <p:txBody>
-          <a:bodyPr rtlCol="0" anchor="ctr"/>
-          <a:lstStyle/>
-          <a:p>
-            <a:pPr algn="ctr"/>
-          </a:p>
-        </p:txBody>
-      </p:sp>
-      <p:sp>
-        <p:nvSpPr>
-          <p:cNvPr id="6" name="Rectangle 5"/>
-          <p:cNvSpPr/>
-          <p:nvPr/>
-        </p:nvSpPr>
-        <p:spPr>
-          <a:xfrm>
-            <a:off x="502920" y="1920240"/>
-            <a:ext cx="5486400" cy="457200"/>
-          </a:xfrm>
-          <a:prstGeom prst="rect">
-            <a:avLst/>
-          </a:prstGeom>
-          <a:solidFill>
-            <a:srgbClr val="3A106E"/>
-          </a:solidFill>
-          <a:ln>
-            <a:noFill/>
-          </a:ln>
-          <a:effectLst/>
-        </p:spPr>
-        <p:style>
-          <a:lnRef idx="1">
-            <a:schemeClr val="accent1"/>
-          </a:lnRef>
-          <a:fillRef idx="3">
-            <a:schemeClr val="accent1"/>
-          </a:fillRef>
-          <a:effectRef idx="2">
-            <a:schemeClr val="accent1"/>
-          </a:effectRef>
-          <a:fontRef idx="minor">
-            <a:schemeClr val="lt1"/>
-          </a:fontRef>
-        </p:style>
-        <p:txBody>
-          <a:bodyPr rtlCol="0" anchor="ctr"/>
-          <a:lstStyle/>
-          <a:p>
-            <a:pPr algn="ctr"/>
-          </a:p>
-        </p:txBody>
-      </p:sp>
-      <p:sp>
-        <p:nvSpPr>
-          <p:cNvPr id="7" name="TextBox 6"/>
-          <p:cNvSpPr txBox="1"/>
-          <p:nvPr/>
-        </p:nvSpPr>
-        <p:spPr>
-          <a:xfrm>
-            <a:off x="502920" y="1920240"/>
-            <a:ext cx="5486400" cy="457200"/>
-          </a:xfrm>
-          <a:prstGeom prst="rect">
-            <a:avLst/>
-          </a:prstGeom>
-          <a:noFill/>
-        </p:spPr>
-        <p:txBody>
-          <a:bodyPr wrap="square" lIns="0" rIns="0" tIns="0" bIns="0" anchor="ctr">
-            <a:spAutoFit/>
-          </a:bodyPr>
-          <a:lstStyle/>
-          <a:p>
-            <a:pPr algn="ctr">
-              <a:spcAft>
-                <a:spcPts val="0"/>
-              </a:spcAft>
-            </a:pPr>
-            <a:r>
-              <a:rPr sz="1200" b="1" i="0">
-                <a:solidFill>
-                  <a:srgbClr val="FFFFFF"/>
-                </a:solidFill>
-                <a:latin typeface="Yu Gothic"/>
-                <a:ea typeface="Yu Gothic"/>
-                <a:cs typeface="Yu Gothic"/>
-              </a:rPr>
-              <a:t>資料の読む順（4ステップ）</a:t>
-            </a:r>
-          </a:p>
-        </p:txBody>
-      </p:sp>
-      <p:sp>
-        <p:nvSpPr>
-          <p:cNvPr id="8" name="Oval 7"/>
-          <p:cNvSpPr/>
-          <p:nvPr/>
-        </p:nvSpPr>
-        <p:spPr>
-          <a:xfrm>
-            <a:off x="713232" y="2578608"/>
-            <a:ext cx="365760" cy="365760"/>
-          </a:xfrm>
-          <a:prstGeom prst="ellipse">
-            <a:avLst/>
-          </a:prstGeom>
-          <a:solidFill>
-            <a:srgbClr val="7823DC"/>
-          </a:solidFill>
-          <a:ln>
-            <a:noFill/>
-          </a:ln>
-          <a:effectLst/>
-        </p:spPr>
-        <p:style>
-          <a:lnRef idx="1">
-            <a:schemeClr val="accent1"/>
-          </a:lnRef>
-          <a:fillRef idx="3">
-            <a:schemeClr val="accent1"/>
-          </a:fillRef>
-          <a:effectRef idx="2">
-            <a:schemeClr val="accent1"/>
-          </a:effectRef>
-          <a:fontRef idx="minor">
-            <a:schemeClr val="lt1"/>
-          </a:fontRef>
-        </p:style>
-        <p:txBody>
-          <a:bodyPr rtlCol="0" anchor="ctr" wrap="none" lIns="0" rIns="0" tIns="0" bIns="0"/>
-          <a:lstStyle/>
-          <a:p>
-            <a:pPr algn="ctr">
-              <a:spcAft>
-                <a:spcPts val="0"/>
-              </a:spcAft>
-            </a:pPr>
-            <a:r>
-              <a:rPr sz="1400" b="1" i="0">
-                <a:solidFill>
-                  <a:srgbClr val="FFFFFF"/>
-                </a:solidFill>
-                <a:latin typeface="Yu Gothic"/>
-                <a:ea typeface="Yu Gothic"/>
-                <a:cs typeface="Yu Gothic"/>
-              </a:rPr>
-              <a:t>1</a:t>
-            </a:r>
-          </a:p>
-        </p:txBody>
-      </p:sp>
-      <p:sp>
-        <p:nvSpPr>
-          <p:cNvPr id="9" name="TextBox 8"/>
-          <p:cNvSpPr txBox="1"/>
-          <p:nvPr/>
-        </p:nvSpPr>
-        <p:spPr>
-          <a:xfrm>
-            <a:off x="1225296" y="2542032"/>
-            <a:ext cx="4626864" cy="566928"/>
-          </a:xfrm>
-          <a:prstGeom prst="rect">
-            <a:avLst/>
-          </a:prstGeom>
-          <a:noFill/>
-        </p:spPr>
-        <p:txBody>
-          <a:bodyPr wrap="square" lIns="0" rIns="0" tIns="0" bIns="0" anchor="ctr">
-            <a:spAutoFit/>
-          </a:bodyPr>
-          <a:lstStyle/>
-          <a:p>
-            <a:pPr algn="l">
-              <a:spcAft>
-                <a:spcPts val="0"/>
-              </a:spcAft>
-            </a:pPr>
-            <a:r>
-              <a:rPr sz="1050" b="0" i="0">
-                <a:solidFill>
-                  <a:srgbClr val="262630"/>
-                </a:solidFill>
-                <a:latin typeface="Yu Gothic"/>
-                <a:ea typeface="Yu Gothic"/>
-                <a:cs typeface="Yu Gothic"/>
-              </a:rPr>
-              <a:t>プロジェクト1枚（全員の共通言語・A4一枚）</a:t>
-            </a:r>
-          </a:p>
-        </p:txBody>
-      </p:sp>
-      <p:sp>
-        <p:nvSpPr>
-          <p:cNvPr id="10" name="Oval 9"/>
-          <p:cNvSpPr/>
-          <p:nvPr/>
-        </p:nvSpPr>
-        <p:spPr>
-          <a:xfrm>
-            <a:off x="713232" y="3145536"/>
-            <a:ext cx="365760" cy="365760"/>
-          </a:xfrm>
-          <a:prstGeom prst="ellipse">
-            <a:avLst/>
-          </a:prstGeom>
-          <a:solidFill>
-            <a:srgbClr val="7823DC"/>
-          </a:solidFill>
-          <a:ln>
-            <a:noFill/>
-          </a:ln>
-          <a:effectLst/>
-        </p:spPr>
-        <p:style>
-          <a:lnRef idx="1">
-            <a:schemeClr val="accent1"/>
-          </a:lnRef>
-          <a:fillRef idx="3">
-            <a:schemeClr val="accent1"/>
-          </a:fillRef>
-          <a:effectRef idx="2">
-            <a:schemeClr val="accent1"/>
-          </a:effectRef>
-          <a:fontRef idx="minor">
-            <a:schemeClr val="lt1"/>
-          </a:fontRef>
-        </p:style>
-        <p:txBody>
-          <a:bodyPr rtlCol="0" anchor="ctr" wrap="none" lIns="0" rIns="0" tIns="0" bIns="0"/>
-          <a:lstStyle/>
-          <a:p>
-            <a:pPr algn="ctr">
-              <a:spcAft>
-                <a:spcPts val="0"/>
-              </a:spcAft>
-            </a:pPr>
-            <a:r>
-              <a:rPr sz="1400" b="1" i="0">
-                <a:solidFill>
-                  <a:srgbClr val="FFFFFF"/>
-                </a:solidFill>
-                <a:latin typeface="Yu Gothic"/>
-                <a:ea typeface="Yu Gothic"/>
-                <a:cs typeface="Yu Gothic"/>
-              </a:rPr>
-              <a:t>2</a:t>
-            </a:r>
-          </a:p>
-        </p:txBody>
-      </p:sp>
-      <p:sp>
-        <p:nvSpPr>
-          <p:cNvPr id="11" name="TextBox 10"/>
-          <p:cNvSpPr txBox="1"/>
-          <p:nvPr/>
-        </p:nvSpPr>
-        <p:spPr>
-          <a:xfrm>
-            <a:off x="1225296" y="3108960"/>
-            <a:ext cx="4626864" cy="566928"/>
-          </a:xfrm>
-          <a:prstGeom prst="rect">
-            <a:avLst/>
-          </a:prstGeom>
-          <a:noFill/>
-        </p:spPr>
-        <p:txBody>
-          <a:bodyPr wrap="square" lIns="0" rIns="0" tIns="0" bIns="0" anchor="ctr">
-            <a:spAutoFit/>
-          </a:bodyPr>
-          <a:lstStyle/>
-          <a:p>
-            <a:pPr algn="l">
-              <a:spcAft>
-                <a:spcPts val="0"/>
-              </a:spcAft>
-            </a:pPr>
-            <a:r>
-              <a:rPr sz="1050" b="0" i="0">
-                <a:solidFill>
-                  <a:srgbClr val="262630"/>
-                </a:solidFill>
-                <a:latin typeface="Yu Gothic"/>
-                <a:ea typeface="Yu Gothic"/>
-                <a:cs typeface="Yu Gothic"/>
-              </a:rPr>
-              <a:t>本ブリーフ（この文書）</a:t>
-            </a:r>
-          </a:p>
-        </p:txBody>
-      </p:sp>
-      <p:sp>
-        <p:nvSpPr>
-          <p:cNvPr id="12" name="Oval 11"/>
-          <p:cNvSpPr/>
-          <p:nvPr/>
-        </p:nvSpPr>
-        <p:spPr>
-          <a:xfrm>
-            <a:off x="713232" y="3712464"/>
-            <a:ext cx="365760" cy="365760"/>
-          </a:xfrm>
-          <a:prstGeom prst="ellipse">
-            <a:avLst/>
-          </a:prstGeom>
-          <a:solidFill>
-            <a:srgbClr val="7823DC"/>
-          </a:solidFill>
-          <a:ln>
-            <a:noFill/>
-          </a:ln>
-          <a:effectLst/>
-        </p:spPr>
-        <p:style>
-          <a:lnRef idx="1">
-            <a:schemeClr val="accent1"/>
-          </a:lnRef>
-          <a:fillRef idx="3">
-            <a:schemeClr val="accent1"/>
-          </a:fillRef>
-          <a:effectRef idx="2">
-            <a:schemeClr val="accent1"/>
-          </a:effectRef>
-          <a:fontRef idx="minor">
-            <a:schemeClr val="lt1"/>
-          </a:fontRef>
-        </p:style>
-        <p:txBody>
-          <a:bodyPr rtlCol="0" anchor="ctr" wrap="none" lIns="0" rIns="0" tIns="0" bIns="0"/>
-          <a:lstStyle/>
-          <a:p>
-            <a:pPr algn="ctr">
-              <a:spcAft>
-                <a:spcPts val="0"/>
-              </a:spcAft>
-            </a:pPr>
-            <a:r>
-              <a:rPr sz="1400" b="1" i="0">
-                <a:solidFill>
-                  <a:srgbClr val="FFFFFF"/>
-                </a:solidFill>
-                <a:latin typeface="Yu Gothic"/>
-                <a:ea typeface="Yu Gothic"/>
-                <a:cs typeface="Yu Gothic"/>
-              </a:rPr>
-              <a:t>3</a:t>
-            </a:r>
-          </a:p>
-        </p:txBody>
-      </p:sp>
-      <p:sp>
-        <p:nvSpPr>
-          <p:cNvPr id="13" name="TextBox 12"/>
-          <p:cNvSpPr txBox="1"/>
-          <p:nvPr/>
-        </p:nvSpPr>
-        <p:spPr>
-          <a:xfrm>
-            <a:off x="1225296" y="3675888"/>
-            <a:ext cx="4626864" cy="566928"/>
-          </a:xfrm>
-          <a:prstGeom prst="rect">
-            <a:avLst/>
-          </a:prstGeom>
-          <a:noFill/>
-        </p:spPr>
-        <p:txBody>
-          <a:bodyPr wrap="square" lIns="0" rIns="0" tIns="0" bIns="0" anchor="ctr">
-            <a:spAutoFit/>
-          </a:bodyPr>
-          <a:lstStyle/>
-          <a:p>
-            <a:pPr algn="l">
-              <a:spcAft>
-                <a:spcPts val="0"/>
-              </a:spcAft>
-            </a:pPr>
-            <a:r>
-              <a:rPr sz="1050" b="0" i="0">
-                <a:solidFill>
-                  <a:srgbClr val="262630"/>
-                </a:solidFill>
-                <a:latin typeface="Yu Gothic"/>
-                <a:ea typeface="Yu Gothic"/>
-                <a:cs typeface="Yu Gothic"/>
-              </a:rPr>
-              <a:t>STO設計書＋運用指南書2章（小沢さんの章）</a:t>
-            </a:r>
-          </a:p>
-        </p:txBody>
-      </p:sp>
-      <p:sp>
-        <p:nvSpPr>
-          <p:cNvPr id="14" name="Oval 13"/>
-          <p:cNvSpPr/>
-          <p:nvPr/>
-        </p:nvSpPr>
-        <p:spPr>
-          <a:xfrm>
-            <a:off x="713232" y="4279392"/>
-            <a:ext cx="365760" cy="365760"/>
-          </a:xfrm>
-          <a:prstGeom prst="ellipse">
-            <a:avLst/>
-          </a:prstGeom>
-          <a:solidFill>
-            <a:srgbClr val="7823DC"/>
-          </a:solidFill>
-          <a:ln>
-            <a:noFill/>
-          </a:ln>
-          <a:effectLst/>
-        </p:spPr>
-        <p:style>
-          <a:lnRef idx="1">
-            <a:schemeClr val="accent1"/>
-          </a:lnRef>
-          <a:fillRef idx="3">
-            <a:schemeClr val="accent1"/>
-          </a:fillRef>
-          <a:effectRef idx="2">
-            <a:schemeClr val="accent1"/>
-          </a:effectRef>
-          <a:fontRef idx="minor">
-            <a:schemeClr val="lt1"/>
-          </a:fontRef>
-        </p:style>
-        <p:txBody>
-          <a:bodyPr rtlCol="0" anchor="ctr" wrap="none" lIns="0" rIns="0" tIns="0" bIns="0"/>
-          <a:lstStyle/>
-          <a:p>
-            <a:pPr algn="ctr">
-              <a:spcAft>
-                <a:spcPts val="0"/>
-              </a:spcAft>
-            </a:pPr>
-            <a:r>
-              <a:rPr sz="1400" b="1" i="0">
-                <a:solidFill>
-                  <a:srgbClr val="FFFFFF"/>
-                </a:solidFill>
-                <a:latin typeface="Yu Gothic"/>
-                <a:ea typeface="Yu Gothic"/>
-                <a:cs typeface="Yu Gothic"/>
-              </a:rPr>
-              <a:t>4</a:t>
-            </a:r>
-          </a:p>
-        </p:txBody>
-      </p:sp>
-      <p:sp>
-        <p:nvSpPr>
-          <p:cNvPr id="15" name="TextBox 14"/>
-          <p:cNvSpPr txBox="1"/>
-          <p:nvPr/>
-        </p:nvSpPr>
-        <p:spPr>
-          <a:xfrm>
-            <a:off x="1225296" y="4242816"/>
-            <a:ext cx="4626864" cy="566928"/>
-          </a:xfrm>
-          <a:prstGeom prst="rect">
-            <a:avLst/>
-          </a:prstGeom>
-          <a:noFill/>
-        </p:spPr>
-        <p:txBody>
-          <a:bodyPr wrap="square" lIns="0" rIns="0" tIns="0" bIns="0" anchor="ctr">
-            <a:spAutoFit/>
-          </a:bodyPr>
-          <a:lstStyle/>
-          <a:p>
-            <a:pPr algn="l">
-              <a:spcAft>
-                <a:spcPts val="0"/>
-              </a:spcAft>
-            </a:pPr>
-            <a:r>
-              <a:rPr sz="1050" b="0" i="0">
-                <a:solidFill>
-                  <a:srgbClr val="262630"/>
-                </a:solidFill>
-                <a:latin typeface="Yu Gothic"/>
-                <a:ea typeface="Yu Gothic"/>
-                <a:cs typeface="Yu Gothic"/>
-              </a:rPr>
-              <a:t>着手テーマの該当設計メモを都度（成果目標／監修改革ほか）</a:t>
-            </a:r>
-          </a:p>
-        </p:txBody>
-      </p:sp>
-      <p:sp>
-        <p:nvSpPr>
-          <p:cNvPr id="16" name="Rectangle 15"/>
-          <p:cNvSpPr/>
-          <p:nvPr/>
-        </p:nvSpPr>
-        <p:spPr>
-          <a:xfrm>
-            <a:off x="6199632" y="1920240"/>
-            <a:ext cx="5486400" cy="2999232"/>
-          </a:xfrm>
-          <a:prstGeom prst="rect">
-            <a:avLst/>
-          </a:prstGeom>
-          <a:solidFill>
-            <a:srgbClr val="FFFFFF"/>
-          </a:solidFill>
-          <a:ln w="9525">
-            <a:solidFill>
-              <a:srgbClr val="D9D9E0"/>
-            </a:solidFill>
-          </a:ln>
-          <a:effectLst/>
-        </p:spPr>
-        <p:style>
-          <a:lnRef idx="1">
-            <a:schemeClr val="accent1"/>
-          </a:lnRef>
-          <a:fillRef idx="3">
-            <a:schemeClr val="accent1"/>
-          </a:fillRef>
-          <a:effectRef idx="2">
-            <a:schemeClr val="accent1"/>
-          </a:effectRef>
-          <a:fontRef idx="minor">
-            <a:schemeClr val="lt1"/>
-          </a:fontRef>
-        </p:style>
-        <p:txBody>
-          <a:bodyPr rtlCol="0" anchor="ctr"/>
-          <a:lstStyle/>
-          <a:p>
-            <a:pPr algn="ctr"/>
-          </a:p>
-        </p:txBody>
-      </p:sp>
-      <p:sp>
-        <p:nvSpPr>
-          <p:cNvPr id="17" name="Rectangle 16"/>
-          <p:cNvSpPr/>
-          <p:nvPr/>
-        </p:nvSpPr>
-        <p:spPr>
-          <a:xfrm>
-            <a:off x="6199632" y="1920240"/>
-            <a:ext cx="5486400" cy="457200"/>
-          </a:xfrm>
-          <a:prstGeom prst="rect">
-            <a:avLst/>
-          </a:prstGeom>
-          <a:solidFill>
-            <a:srgbClr val="7823DC"/>
-          </a:solidFill>
-          <a:ln>
-            <a:noFill/>
-          </a:ln>
-          <a:effectLst/>
-        </p:spPr>
-        <p:style>
-          <a:lnRef idx="1">
-            <a:schemeClr val="accent1"/>
-          </a:lnRef>
-          <a:fillRef idx="3">
-            <a:schemeClr val="accent1"/>
-          </a:fillRef>
-          <a:effectRef idx="2">
-            <a:schemeClr val="accent1"/>
-          </a:effectRef>
-          <a:fontRef idx="minor">
-            <a:schemeClr val="lt1"/>
-          </a:fontRef>
-        </p:style>
-        <p:txBody>
-          <a:bodyPr rtlCol="0" anchor="ctr"/>
-          <a:lstStyle/>
-          <a:p>
-            <a:pPr algn="ctr"/>
-          </a:p>
-        </p:txBody>
-      </p:sp>
-      <p:sp>
-        <p:nvSpPr>
-          <p:cNvPr id="18" name="TextBox 17"/>
-          <p:cNvSpPr txBox="1"/>
-          <p:nvPr/>
-        </p:nvSpPr>
-        <p:spPr>
-          <a:xfrm>
-            <a:off x="6199632" y="1920240"/>
-            <a:ext cx="5486400" cy="457200"/>
-          </a:xfrm>
-          <a:prstGeom prst="rect">
-            <a:avLst/>
-          </a:prstGeom>
-          <a:noFill/>
-        </p:spPr>
-        <p:txBody>
-          <a:bodyPr wrap="square" lIns="0" rIns="0" tIns="0" bIns="0" anchor="ctr">
-            <a:spAutoFit/>
-          </a:bodyPr>
-          <a:lstStyle/>
-          <a:p>
-            <a:pPr algn="ctr">
-              <a:spcAft>
-                <a:spcPts val="0"/>
-              </a:spcAft>
-            </a:pPr>
-            <a:r>
-              <a:rPr sz="1200" b="1" i="0">
-                <a:solidFill>
-                  <a:srgbClr val="FFFFFF"/>
-                </a:solidFill>
-                <a:latin typeface="Yu Gothic"/>
-                <a:ea typeface="Yu Gothic"/>
-                <a:cs typeface="Yu Gothic"/>
-              </a:rPr>
-              <a:t>初週の予定（新谷がセット）</a:t>
-            </a:r>
-          </a:p>
-        </p:txBody>
-      </p:sp>
-      <p:sp>
-        <p:nvSpPr>
-          <p:cNvPr id="19" name="Rectangle 18"/>
-          <p:cNvSpPr/>
-          <p:nvPr/>
-        </p:nvSpPr>
-        <p:spPr>
-          <a:xfrm>
-            <a:off x="6400800" y="2596896"/>
-            <a:ext cx="1188720" cy="384048"/>
-          </a:xfrm>
-          <a:prstGeom prst="rect">
-            <a:avLst/>
-          </a:prstGeom>
-          <a:solidFill>
-            <a:srgbClr val="F3EFFB"/>
-          </a:solidFill>
-          <a:ln>
-            <a:noFill/>
-          </a:ln>
-          <a:effectLst/>
-        </p:spPr>
-        <p:style>
-          <a:lnRef idx="1">
-            <a:schemeClr val="accent1"/>
-          </a:lnRef>
-          <a:fillRef idx="3">
-            <a:schemeClr val="accent1"/>
-          </a:fillRef>
-          <a:effectRef idx="2">
-            <a:schemeClr val="accent1"/>
-          </a:effectRef>
-          <a:fontRef idx="minor">
-            <a:schemeClr val="lt1"/>
-          </a:fontRef>
-        </p:style>
-        <p:txBody>
-          <a:bodyPr rtlCol="0" anchor="ctr"/>
-          <a:lstStyle/>
-          <a:p>
-            <a:pPr algn="ctr"/>
-          </a:p>
-        </p:txBody>
-      </p:sp>
-      <p:sp>
-        <p:nvSpPr>
-          <p:cNvPr id="20" name="TextBox 19"/>
-          <p:cNvSpPr txBox="1"/>
-          <p:nvPr/>
-        </p:nvSpPr>
-        <p:spPr>
-          <a:xfrm>
-            <a:off x="6400800" y="2596896"/>
-            <a:ext cx="1188720" cy="384048"/>
-          </a:xfrm>
-          <a:prstGeom prst="rect">
-            <a:avLst/>
-          </a:prstGeom>
-          <a:noFill/>
-        </p:spPr>
-        <p:txBody>
-          <a:bodyPr wrap="square" lIns="0" rIns="0" tIns="0" bIns="0" anchor="ctr">
-            <a:spAutoFit/>
-          </a:bodyPr>
-          <a:lstStyle/>
-          <a:p>
-            <a:pPr algn="ctr">
-              <a:spcAft>
-                <a:spcPts val="0"/>
-              </a:spcAft>
-            </a:pPr>
-            <a:r>
-              <a:rPr sz="1000" b="1" i="0">
-                <a:solidFill>
-                  <a:srgbClr val="7823DC"/>
-                </a:solidFill>
-                <a:latin typeface="Yu Gothic"/>
-                <a:ea typeface="Yu Gothic"/>
-                <a:cs typeface="Yu Gothic"/>
-              </a:rPr>
-              <a:t>30分</a:t>
-            </a:r>
-          </a:p>
-        </p:txBody>
-      </p:sp>
-      <p:sp>
-        <p:nvSpPr>
-          <p:cNvPr id="21" name="TextBox 20"/>
-          <p:cNvSpPr txBox="1"/>
-          <p:nvPr/>
-        </p:nvSpPr>
-        <p:spPr>
-          <a:xfrm>
-            <a:off x="7717536" y="2542032"/>
-            <a:ext cx="3803904" cy="566928"/>
-          </a:xfrm>
-          <a:prstGeom prst="rect">
-            <a:avLst/>
-          </a:prstGeom>
-          <a:noFill/>
-        </p:spPr>
-        <p:txBody>
-          <a:bodyPr wrap="square" lIns="0" rIns="0" tIns="0" bIns="0" anchor="ctr">
-            <a:spAutoFit/>
-          </a:bodyPr>
-          <a:lstStyle/>
-          <a:p>
-            <a:pPr algn="l">
-              <a:spcAft>
-                <a:spcPts val="0"/>
-              </a:spcAft>
-            </a:pPr>
-            <a:r>
-              <a:rPr sz="1050" b="0" i="0">
-                <a:solidFill>
-                  <a:srgbClr val="262630"/>
-                </a:solidFill>
-                <a:latin typeface="Yu Gothic"/>
-                <a:ea typeface="Yu Gothic"/>
-                <a:cs typeface="Yu Gothic"/>
-              </a:rPr>
-              <a:t>この文書の読み合わせ</a:t>
-            </a:r>
-          </a:p>
-        </p:txBody>
-      </p:sp>
-      <p:sp>
-        <p:nvSpPr>
-          <p:cNvPr id="22" name="Rectangle 21"/>
-          <p:cNvSpPr/>
-          <p:nvPr/>
-        </p:nvSpPr>
-        <p:spPr>
-          <a:xfrm>
-            <a:off x="6400800" y="3163824"/>
-            <a:ext cx="1188720" cy="384048"/>
-          </a:xfrm>
-          <a:prstGeom prst="rect">
-            <a:avLst/>
-          </a:prstGeom>
-          <a:solidFill>
-            <a:srgbClr val="F3EFFB"/>
-          </a:solidFill>
-          <a:ln>
-            <a:noFill/>
-          </a:ln>
-          <a:effectLst/>
-        </p:spPr>
-        <p:style>
-          <a:lnRef idx="1">
-            <a:schemeClr val="accent1"/>
-          </a:lnRef>
-          <a:fillRef idx="3">
-            <a:schemeClr val="accent1"/>
-          </a:fillRef>
-          <a:effectRef idx="2">
-            <a:schemeClr val="accent1"/>
-          </a:effectRef>
-          <a:fontRef idx="minor">
-            <a:schemeClr val="lt1"/>
-          </a:fontRef>
-        </p:style>
-        <p:txBody>
-          <a:bodyPr rtlCol="0" anchor="ctr"/>
-          <a:lstStyle/>
-          <a:p>
-            <a:pPr algn="ctr"/>
-          </a:p>
-        </p:txBody>
-      </p:sp>
-      <p:sp>
-        <p:nvSpPr>
-          <p:cNvPr id="23" name="TextBox 22"/>
-          <p:cNvSpPr txBox="1"/>
-          <p:nvPr/>
-        </p:nvSpPr>
-        <p:spPr>
-          <a:xfrm>
-            <a:off x="6400800" y="3163824"/>
-            <a:ext cx="1188720" cy="384048"/>
-          </a:xfrm>
-          <a:prstGeom prst="rect">
-            <a:avLst/>
-          </a:prstGeom>
-          <a:noFill/>
-        </p:spPr>
-        <p:txBody>
-          <a:bodyPr wrap="square" lIns="0" rIns="0" tIns="0" bIns="0" anchor="ctr">
-            <a:spAutoFit/>
-          </a:bodyPr>
-          <a:lstStyle/>
-          <a:p>
-            <a:pPr algn="ctr">
-              <a:spcAft>
-                <a:spcPts val="0"/>
-              </a:spcAft>
-            </a:pPr>
-            <a:r>
-              <a:rPr sz="1000" b="1" i="0">
-                <a:solidFill>
-                  <a:srgbClr val="7823DC"/>
-                </a:solidFill>
-                <a:latin typeface="Yu Gothic"/>
-                <a:ea typeface="Yu Gothic"/>
-                <a:cs typeface="Yu Gothic"/>
-              </a:rPr>
-              <a:t>60分</a:t>
-            </a:r>
-          </a:p>
-        </p:txBody>
-      </p:sp>
-      <p:sp>
-        <p:nvSpPr>
-          <p:cNvPr id="24" name="TextBox 23"/>
-          <p:cNvSpPr txBox="1"/>
-          <p:nvPr/>
-        </p:nvSpPr>
-        <p:spPr>
-          <a:xfrm>
-            <a:off x="7717536" y="3108960"/>
-            <a:ext cx="3803904" cy="566928"/>
-          </a:xfrm>
-          <a:prstGeom prst="rect">
-            <a:avLst/>
-          </a:prstGeom>
-          <a:noFill/>
-        </p:spPr>
-        <p:txBody>
-          <a:bodyPr wrap="square" lIns="0" rIns="0" tIns="0" bIns="0" anchor="ctr">
-            <a:spAutoFit/>
-          </a:bodyPr>
-          <a:lstStyle/>
-          <a:p>
-            <a:pPr algn="l">
-              <a:spcAft>
-                <a:spcPts val="0"/>
-              </a:spcAft>
-            </a:pPr>
-            <a:r>
-              <a:rPr sz="1050" b="0" i="0">
-                <a:solidFill>
-                  <a:srgbClr val="262630"/>
-                </a:solidFill>
-                <a:latin typeface="Yu Gothic"/>
-                <a:ea typeface="Yu Gothic"/>
-                <a:cs typeface="Yu Gothic"/>
-              </a:rPr>
-              <a:t>坪井さんとデータ現在地確認</a:t>
-            </a:r>
-          </a:p>
-        </p:txBody>
-      </p:sp>
-      <p:sp>
-        <p:nvSpPr>
-          <p:cNvPr id="25" name="Rectangle 24"/>
-          <p:cNvSpPr/>
-          <p:nvPr/>
-        </p:nvSpPr>
-        <p:spPr>
-          <a:xfrm>
-            <a:off x="6400800" y="3730752"/>
-            <a:ext cx="1188720" cy="384048"/>
-          </a:xfrm>
-          <a:prstGeom prst="rect">
-            <a:avLst/>
-          </a:prstGeom>
-          <a:solidFill>
-            <a:srgbClr val="F3EFFB"/>
-          </a:solidFill>
-          <a:ln>
-            <a:noFill/>
-          </a:ln>
-          <a:effectLst/>
-        </p:spPr>
-        <p:style>
-          <a:lnRef idx="1">
-            <a:schemeClr val="accent1"/>
-          </a:lnRef>
-          <a:fillRef idx="3">
-            <a:schemeClr val="accent1"/>
-          </a:fillRef>
-          <a:effectRef idx="2">
-            <a:schemeClr val="accent1"/>
-          </a:effectRef>
-          <a:fontRef idx="minor">
-            <a:schemeClr val="lt1"/>
-          </a:fontRef>
-        </p:style>
-        <p:txBody>
-          <a:bodyPr rtlCol="0" anchor="ctr"/>
-          <a:lstStyle/>
-          <a:p>
-            <a:pPr algn="ctr"/>
-          </a:p>
-        </p:txBody>
-      </p:sp>
-      <p:sp>
-        <p:nvSpPr>
-          <p:cNvPr id="26" name="TextBox 25"/>
-          <p:cNvSpPr txBox="1"/>
-          <p:nvPr/>
-        </p:nvSpPr>
-        <p:spPr>
-          <a:xfrm>
-            <a:off x="6400800" y="3730752"/>
-            <a:ext cx="1188720" cy="384048"/>
-          </a:xfrm>
-          <a:prstGeom prst="rect">
-            <a:avLst/>
-          </a:prstGeom>
-          <a:noFill/>
-        </p:spPr>
-        <p:txBody>
-          <a:bodyPr wrap="square" lIns="0" rIns="0" tIns="0" bIns="0" anchor="ctr">
-            <a:spAutoFit/>
-          </a:bodyPr>
-          <a:lstStyle/>
-          <a:p>
-            <a:pPr algn="ctr">
-              <a:spcAft>
-                <a:spcPts val="0"/>
-              </a:spcAft>
-            </a:pPr>
-            <a:r>
-              <a:rPr sz="1000" b="1" i="0">
-                <a:solidFill>
-                  <a:srgbClr val="7823DC"/>
-                </a:solidFill>
-                <a:latin typeface="Yu Gothic"/>
-                <a:ea typeface="Yu Gothic"/>
-                <a:cs typeface="Yu Gothic"/>
-              </a:rPr>
-              <a:t>30分</a:t>
-            </a:r>
-          </a:p>
-        </p:txBody>
-      </p:sp>
-      <p:sp>
-        <p:nvSpPr>
-          <p:cNvPr id="27" name="TextBox 26"/>
-          <p:cNvSpPr txBox="1"/>
-          <p:nvPr/>
-        </p:nvSpPr>
-        <p:spPr>
-          <a:xfrm>
-            <a:off x="7717536" y="3675888"/>
-            <a:ext cx="3803904" cy="566928"/>
-          </a:xfrm>
-          <a:prstGeom prst="rect">
-            <a:avLst/>
-          </a:prstGeom>
-          <a:noFill/>
-        </p:spPr>
-        <p:txBody>
-          <a:bodyPr wrap="square" lIns="0" rIns="0" tIns="0" bIns="0" anchor="ctr">
-            <a:spAutoFit/>
-          </a:bodyPr>
-          <a:lstStyle/>
-          <a:p>
-            <a:pPr algn="l">
-              <a:spcAft>
-                <a:spcPts val="0"/>
-              </a:spcAft>
-            </a:pPr>
-            <a:r>
-              <a:rPr sz="1050" b="0" i="0">
-                <a:solidFill>
-                  <a:srgbClr val="262630"/>
-                </a:solidFill>
-                <a:latin typeface="Yu Gothic"/>
-                <a:ea typeface="Yu Gothic"/>
-                <a:cs typeface="Yu Gothic"/>
-              </a:rPr>
-              <a:t>大塩さんと読み管理・並走PJ引き継ぎ</a:t>
-            </a:r>
-          </a:p>
-        </p:txBody>
-      </p:sp>
-      <p:sp>
-        <p:nvSpPr>
-          <p:cNvPr id="28" name="Rectangle 27"/>
-          <p:cNvSpPr/>
-          <p:nvPr/>
-        </p:nvSpPr>
-        <p:spPr>
-          <a:xfrm>
-            <a:off x="6400800" y="4297680"/>
-            <a:ext cx="1188720" cy="384048"/>
-          </a:xfrm>
-          <a:prstGeom prst="rect">
-            <a:avLst/>
-          </a:prstGeom>
-          <a:solidFill>
-            <a:srgbClr val="F3EFFB"/>
-          </a:solidFill>
-          <a:ln>
-            <a:noFill/>
-          </a:ln>
-          <a:effectLst/>
-        </p:spPr>
-        <p:style>
-          <a:lnRef idx="1">
-            <a:schemeClr val="accent1"/>
-          </a:lnRef>
-          <a:fillRef idx="3">
-            <a:schemeClr val="accent1"/>
-          </a:fillRef>
-          <a:effectRef idx="2">
-            <a:schemeClr val="accent1"/>
-          </a:effectRef>
-          <a:fontRef idx="minor">
-            <a:schemeClr val="lt1"/>
-          </a:fontRef>
-        </p:style>
-        <p:txBody>
-          <a:bodyPr rtlCol="0" anchor="ctr"/>
-          <a:lstStyle/>
-          <a:p>
-            <a:pPr algn="ctr"/>
-          </a:p>
-        </p:txBody>
-      </p:sp>
-      <p:sp>
-        <p:nvSpPr>
-          <p:cNvPr id="29" name="TextBox 28"/>
-          <p:cNvSpPr txBox="1"/>
-          <p:nvPr/>
-        </p:nvSpPr>
-        <p:spPr>
-          <a:xfrm>
-            <a:off x="6400800" y="4297680"/>
-            <a:ext cx="1188720" cy="384048"/>
-          </a:xfrm>
-          <a:prstGeom prst="rect">
-            <a:avLst/>
-          </a:prstGeom>
-          <a:noFill/>
-        </p:spPr>
-        <p:txBody>
-          <a:bodyPr wrap="square" lIns="0" rIns="0" tIns="0" bIns="0" anchor="ctr">
-            <a:spAutoFit/>
-          </a:bodyPr>
-          <a:lstStyle/>
-          <a:p>
-            <a:pPr algn="ctr">
-              <a:spcAft>
-                <a:spcPts val="0"/>
-              </a:spcAft>
-            </a:pPr>
-            <a:r>
-              <a:rPr sz="1000" b="1" i="0">
-                <a:solidFill>
-                  <a:srgbClr val="7823DC"/>
-                </a:solidFill>
-                <a:latin typeface="Yu Gothic"/>
-                <a:ea typeface="Yu Gothic"/>
-                <a:cs typeface="Yu Gothic"/>
-              </a:rPr>
-              <a:t>金曜17:00</a:t>
-            </a:r>
-          </a:p>
-        </p:txBody>
-      </p:sp>
-      <p:sp>
-        <p:nvSpPr>
-          <p:cNvPr id="30" name="TextBox 29"/>
-          <p:cNvSpPr txBox="1"/>
-          <p:nvPr/>
-        </p:nvSpPr>
-        <p:spPr>
-          <a:xfrm>
-            <a:off x="7717536" y="4242816"/>
-            <a:ext cx="3803904" cy="566928"/>
-          </a:xfrm>
-          <a:prstGeom prst="rect">
-            <a:avLst/>
-          </a:prstGeom>
-          <a:noFill/>
-        </p:spPr>
-        <p:txBody>
-          <a:bodyPr wrap="square" lIns="0" rIns="0" tIns="0" bIns="0" anchor="ctr">
-            <a:spAutoFit/>
-          </a:bodyPr>
-          <a:lstStyle/>
-          <a:p>
-            <a:pPr algn="l">
-              <a:spcAft>
-                <a:spcPts val="0"/>
-              </a:spcAft>
-            </a:pPr>
-            <a:r>
-              <a:rPr sz="1050" b="0" i="0">
-                <a:solidFill>
-                  <a:srgbClr val="262630"/>
-                </a:solidFill>
-                <a:latin typeface="Yu Gothic"/>
-                <a:ea typeface="Yu Gothic"/>
-                <a:cs typeface="Yu Gothic"/>
-              </a:rPr>
-              <a:t>週次レビューに初参加</a:t>
-            </a:r>
-          </a:p>
-        </p:txBody>
-      </p:sp>
-      <p:sp>
-        <p:nvSpPr>
-          <p:cNvPr id="31" name="Rectangle 30"/>
-          <p:cNvSpPr/>
-          <p:nvPr/>
-        </p:nvSpPr>
-        <p:spPr>
-          <a:xfrm>
-            <a:off x="502920" y="5138928"/>
-            <a:ext cx="11183112" cy="1005840"/>
-          </a:xfrm>
-          <a:prstGeom prst="rect">
-            <a:avLst/>
-          </a:prstGeom>
-          <a:solidFill>
-            <a:srgbClr val="3A106E"/>
-          </a:solidFill>
-          <a:ln>
-            <a:noFill/>
-          </a:ln>
-          <a:effectLst/>
-        </p:spPr>
-        <p:style>
-          <a:lnRef idx="1">
-            <a:schemeClr val="accent1"/>
-          </a:lnRef>
-          <a:fillRef idx="3">
-            <a:schemeClr val="accent1"/>
-          </a:fillRef>
-          <a:effectRef idx="2">
-            <a:schemeClr val="accent1"/>
-          </a:effectRef>
-          <a:fontRef idx="minor">
-            <a:schemeClr val="lt1"/>
-          </a:fontRef>
-        </p:style>
-        <p:txBody>
-          <a:bodyPr rtlCol="0" anchor="ctr"/>
-          <a:lstStyle/>
-          <a:p>
-            <a:pPr algn="ctr"/>
-          </a:p>
-        </p:txBody>
-      </p:sp>
-      <p:sp>
-        <p:nvSpPr>
-          <p:cNvPr id="32" name="Rectangle 31"/>
-          <p:cNvSpPr/>
-          <p:nvPr/>
-        </p:nvSpPr>
-        <p:spPr>
-          <a:xfrm>
-            <a:off x="502920" y="5138928"/>
-            <a:ext cx="38100" cy="1005840"/>
-          </a:xfrm>
-          <a:prstGeom prst="rect">
-            <a:avLst/>
-          </a:prstGeom>
-          <a:solidFill>
-            <a:srgbClr val="7823DC"/>
-          </a:solidFill>
-          <a:ln>
-            <a:noFill/>
-          </a:ln>
-          <a:effectLst/>
-        </p:spPr>
-        <p:style>
-          <a:lnRef idx="1">
-            <a:schemeClr val="accent1"/>
-          </a:lnRef>
-          <a:fillRef idx="3">
-            <a:schemeClr val="accent1"/>
-          </a:fillRef>
-          <a:effectRef idx="2">
-            <a:schemeClr val="accent1"/>
-          </a:effectRef>
-          <a:fontRef idx="minor">
-            <a:schemeClr val="lt1"/>
-          </a:fontRef>
-        </p:style>
-        <p:txBody>
-          <a:bodyPr rtlCol="0" anchor="ctr"/>
-          <a:lstStyle/>
-          <a:p>
-            <a:pPr algn="ctr"/>
-          </a:p>
-        </p:txBody>
-      </p:sp>
-      <p:sp>
-        <p:nvSpPr>
-          <p:cNvPr id="33" name="TextBox 32"/>
-          <p:cNvSpPr txBox="1"/>
-          <p:nvPr/>
-        </p:nvSpPr>
-        <p:spPr>
-          <a:xfrm>
-            <a:off x="777240" y="5285232"/>
-            <a:ext cx="10698480" cy="749808"/>
-          </a:xfrm>
-          <a:prstGeom prst="rect">
-            <a:avLst/>
-          </a:prstGeom>
-          <a:noFill/>
-        </p:spPr>
-        <p:txBody>
-          <a:bodyPr wrap="square" lIns="0" rIns="0" tIns="0" bIns="0" anchor="ctr">
-            <a:spAutoFit/>
-          </a:bodyPr>
-          <a:lstStyle/>
-          <a:p>
-            <a:pPr algn="l">
-              <a:spcAft>
-                <a:spcPts val="400"/>
-              </a:spcAft>
-            </a:pPr>
-            <a:r>
-              <a:rPr sz="1300" b="1" i="0">
-                <a:solidFill>
-                  <a:srgbClr val="FFFFFF"/>
-                </a:solidFill>
-                <a:latin typeface="Yu Gothic"/>
-                <a:ea typeface="Yu Gothic"/>
-                <a:cs typeface="Yu Gothic"/>
-              </a:rPr>
-              <a:t>外から来た目で「これはおかしい」を遠慮なく言ってください。</a:t>
-            </a:r>
-          </a:p>
-          <a:p>
-            <a:pPr algn="l">
-              <a:spcAft>
-                <a:spcPts val="0"/>
-              </a:spcAft>
-            </a:pPr>
-            <a:r>
-              <a:rPr sz="1300" b="1" i="0">
-                <a:solidFill>
-                  <a:srgbClr val="E0D2F6"/>
-                </a:solidFill>
-                <a:latin typeface="Yu Gothic"/>
-                <a:ea typeface="Yu Gothic"/>
-                <a:cs typeface="Yu Gothic"/>
-              </a:rPr>
-              <a:t>それを言ってもらうための専任です。</a:t>
-            </a:r>
-          </a:p>
-        </p:txBody>
-      </p:sp>
-      <p:sp>
-        <p:nvSpPr>
-          <p:cNvPr id="34" name="Rectangle 33"/>
-          <p:cNvSpPr/>
-          <p:nvPr/>
-        </p:nvSpPr>
-        <p:spPr>
-          <a:xfrm>
-            <a:off x="502920" y="6510528"/>
-            <a:ext cx="11183112" cy="15240"/>
-          </a:xfrm>
-          <a:prstGeom prst="rect">
-            <a:avLst/>
-          </a:prstGeom>
-          <a:solidFill>
-            <a:srgbClr val="D9D9E0"/>
-          </a:solidFill>
-          <a:ln>
-            <a:noFill/>
-          </a:ln>
-          <a:effectLst/>
-        </p:spPr>
-        <p:style>
-          <a:lnRef idx="1">
-            <a:schemeClr val="accent1"/>
-          </a:lnRef>
-          <a:fillRef idx="3">
-            <a:schemeClr val="accent1"/>
-          </a:fillRef>
-          <a:effectRef idx="2">
-            <a:schemeClr val="accent1"/>
-          </a:effectRef>
-          <a:fontRef idx="minor">
-            <a:schemeClr val="lt1"/>
-          </a:fontRef>
-        </p:style>
-        <p:txBody>
-          <a:bodyPr rtlCol="0" anchor="ctr"/>
-          <a:lstStyle/>
-          <a:p>
-            <a:pPr algn="ctr"/>
-          </a:p>
-        </p:txBody>
-      </p:sp>
-      <p:sp>
-        <p:nvSpPr>
-          <p:cNvPr id="35" name="TextBox 34"/>
-          <p:cNvSpPr txBox="1"/>
-          <p:nvPr/>
-        </p:nvSpPr>
-        <p:spPr>
-          <a:xfrm>
-            <a:off x="502920" y="6565392"/>
-            <a:ext cx="8686800" cy="274320"/>
-          </a:xfrm>
-          <a:prstGeom prst="rect">
-            <a:avLst/>
-          </a:prstGeom>
-          <a:noFill/>
-        </p:spPr>
-        <p:txBody>
-          <a:bodyPr wrap="square" lIns="0" rIns="0" tIns="0" bIns="0">
-            <a:spAutoFit/>
-          </a:bodyPr>
-          <a:lstStyle/>
-          <a:p>
-            <a:pPr algn="l">
-              <a:spcAft>
-                <a:spcPts val="400"/>
-              </a:spcAft>
-            </a:pPr>
-            <a:r>
-              <a:rPr sz="750" b="0" i="0">
-                <a:solidFill>
-                  <a:srgbClr val="8A8A99"/>
-                </a:solidFill>
-                <a:latin typeface="Yu Gothic"/>
-                <a:ea typeface="Yu Gothic"/>
-                <a:cs typeface="Yu Gothic"/>
-              </a:rPr>
-              <a:t>円谷プロダクション 営業改革 | 社外秘</a:t>
-            </a:r>
-          </a:p>
-        </p:txBody>
-      </p:sp>
-      <p:sp>
-        <p:nvSpPr>
-          <p:cNvPr id="36" name="TextBox 35"/>
-          <p:cNvSpPr txBox="1"/>
-          <p:nvPr/>
-        </p:nvSpPr>
-        <p:spPr>
-          <a:xfrm>
-            <a:off x="11247120" y="6565392"/>
-            <a:ext cx="457200" cy="274320"/>
-          </a:xfrm>
-          <a:prstGeom prst="rect">
-            <a:avLst/>
-          </a:prstGeom>
-          <a:noFill/>
-        </p:spPr>
-        <p:txBody>
-          <a:bodyPr wrap="square" lIns="0" rIns="0" tIns="0" bIns="0">
-            <a:spAutoFit/>
-          </a:bodyPr>
-          <a:lstStyle/>
-          <a:p>
-            <a:pPr algn="r">
-              <a:spcAft>
-                <a:spcPts val="400"/>
-              </a:spcAft>
-            </a:pPr>
-            <a:r>
-              <a:rPr sz="900" b="0" i="0">
-                <a:solidFill>
-                  <a:srgbClr val="5F5F6E"/>
-                </a:solidFill>
-                <a:latin typeface="Yu Gothic"/>
-                <a:ea typeface="Yu Gothic"/>
-                <a:cs typeface="Yu Gothic"/>
-              </a:rPr>
               <a:t>9</a:t>
             </a:r>
           </a:p>

--- a/docs/営業改革_小沢さん着任ブリーフ.pptx
+++ b/docs/営業改革_小沢さん着任ブリーフ.pptx
@@ -3487,7 +3487,7 @@
                 <a:ea typeface="Yu Gothic"/>
                 <a:cs typeface="Yu Gothic"/>
               </a:rPr>
-              <a:t>小沢さん 着任にあたって（2026年8月〜）</a:t>
+              <a:t>小沢さん 着任にあたって（2026年7月16日着任）</a:t>
             </a:r>
           </a:p>
         </p:txBody>
@@ -8873,7 +8873,7 @@
                 <a:ea typeface="Yu Gothic"/>
                 <a:cs typeface="Yu Gothic"/>
               </a:rPr>
-              <a:t>8月の着任時点で待っている状況</a:t>
+              <a:t>いまの状況（着任時点）</a:t>
             </a:r>
           </a:p>
         </p:txBody>
@@ -9107,7 +9107,7 @@
                 <a:ea typeface="Yu Gothic"/>
                 <a:cs typeface="Yu Gothic"/>
               </a:rPr>
-              <a:t>確認会は完了〜終盤</a:t>
+              <a:t>確認会はこれから開始（7/21週）。財務ひも付けは営業側データ（140社ランク・6年分の継続判断）の取り込みから先行</a:t>
             </a:r>
           </a:p>
           <a:p>
@@ -9125,7 +9125,7 @@
                 <a:ea typeface="Yu Gothic"/>
                 <a:cs typeface="Yu Gothic"/>
               </a:rPr>
-              <a:t>主担当が埋まり、財務ひも付けが進行中（柳沼さんの明細受領状況による）</a:t>
+              <a:t/>
             </a:r>
           </a:p>
         </p:txBody>
@@ -9333,7 +9333,7 @@
                 <a:ea typeface="Yu Gothic"/>
                 <a:cs typeface="Yu Gothic"/>
               </a:rPr>
-              <a:t>着任と前後する見込み</a:t>
+              <a:t/>
             </a:r>
           </a:p>
         </p:txBody>
@@ -9523,7 +9523,7 @@
                 <a:ea typeface="Yu Gothic"/>
                 <a:cs typeface="Yu Gothic"/>
               </a:rPr>
-              <a:t>分科会×3が隔週で回り始めている</a:t>
+              <a:t>分科会×3は7/28週に初回を実施し、8/4の初回点検会議（山本会長）に「決議・報告・承認」の3分類で上げる計画</a:t>
             </a:r>
           </a:p>
           <a:p>
@@ -9541,7 +9541,7 @@
                 <a:ea typeface="Yu Gothic"/>
                 <a:cs typeface="Yu Gothic"/>
               </a:rPr>
-              <a:t>初回アジェンダ作成済み：担当役割の定義／確度定義レビュー／会議統廃合／契約改革の着手順</a:t>
+              <a:t/>
             </a:r>
           </a:p>
         </p:txBody>
@@ -13591,7 +13591,7 @@
                           <a:ea typeface="Yu Gothic"/>
                           <a:cs typeface="Yu Gothic"/>
                         </a:rPr>
-                        <a:t>日次の督促・エスカレーション運用の引き取り：現在は新谷が暫定代行中</a:t>
+                        <a:t>日次の督促・エスカレーション運用（今日から小沢さんの担務）</a:t>
                       </a:r>
                     </a:p>
                   </a:txBody>
@@ -13625,7 +13625,7 @@
                           <a:ea typeface="Yu Gothic"/>
                           <a:cs typeface="Yu Gothic"/>
                         </a:rPr>
-                        <a:t>着任後にSTO内で再配分</a:t>
+                        <a:t>即時</a:t>
                       </a:r>
                     </a:p>
                   </a:txBody>
